--- a/curso/pptx/S07.pptx
+++ b/curso/pptx/S07.pptx
@@ -3891,8 +3891,8 @@
         </p:nvSpPr>
         <p:spPr>
           <a:xfrm>
-            <a:off x="640000" y="420000"/>
-            <a:ext cx="10912000" cy="420000"/>
+            <a:off x="10652000" y="380000"/>
+            <a:ext cx="900000" cy="800000"/>
           </a:xfrm>
           <a:prstGeom prst="rect">
             <a:avLst/>
@@ -3907,17 +3907,17 @@
           <a:p>
             <a:pPr>
               <a:spcAft>
-                <a:spcPts val="810"/>
-              </a:spcAft>
-            </a:pPr>
-            <a:r>
-              <a:rPr sz="1800" b="1">
+                <a:spcPts val="1980"/>
+              </a:spcAft>
+            </a:pPr>
+            <a:r>
+              <a:rPr sz="4400" b="0">
                 <a:solidFill>
                   <a:srgbClr val="1F2A44"/>
                 </a:solidFill>
                 <a:latin typeface="Nunito Sans"/>
               </a:rPr>
-              <a:t>🦉 Aula de Filosofía</a:t>
+              <a:t>🙃</a:t>
             </a:r>
           </a:p>
         </p:txBody>

--- a/curso/pptx/S07.pptx
+++ b/curso/pptx/S07.pptx
@@ -472,426 +472,6 @@
     </a:lvl9pPr>
   </p:notesStyle>
 </p:notesMaster>
-</file>
-
-<file path=ppt/notesSlides/notesSlide1.xml><?xml version="1.0" encoding="utf-8"?>
-<p:notes xmlns:a="http://schemas.openxmlformats.org/drawingml/2006/main" xmlns:p="http://schemas.openxmlformats.org/presentationml/2006/main" xmlns:r="http://schemas.openxmlformats.org/officeDocument/2006/relationships">
-  <p:cSld>
-    <p:spTree>
-      <p:nvGrpSpPr>
-        <p:cNvPr id="1" name=""/>
-        <p:cNvGrpSpPr/>
-        <p:nvPr/>
-      </p:nvGrpSpPr>
-      <p:grpSpPr>
-        <a:xfrm>
-          <a:off x="0" y="0"/>
-          <a:ext cx="0" cy="0"/>
-          <a:chOff x="0" y="0"/>
-          <a:chExt cx="0" cy="0"/>
-        </a:xfrm>
-      </p:grpSpPr>
-      <p:sp>
-        <p:nvSpPr>
-          <p:cNvPr id="2" name="Slide Image Placeholder 1"/>
-          <p:cNvSpPr>
-            <a:spLocks noGrp="1"/>
-          </p:cNvSpPr>
-          <p:nvPr>
-            <p:ph type="sldImg" idx="2"/>
-          </p:nvPr>
-        </p:nvSpPr>
-        <p:spPr/>
-      </p:sp>
-      <p:sp>
-        <p:nvSpPr>
-          <p:cNvPr id="3" name="Notes Placeholder 2"/>
-          <p:cNvSpPr>
-            <a:spLocks noGrp="1"/>
-          </p:cNvSpPr>
-          <p:nvPr>
-            <p:ph type="body" idx="3" sz="quarter"/>
-          </p:nvPr>
-        </p:nvSpPr>
-        <p:spPr/>
-        <p:txBody>
-          <a:bodyPr/>
-          <a:lstStyle/>
-          <a:p>
-            <a:r>
-              <a:t>3 minutos. Sin apuntes. Es para recordar, no cuenta para nota.</a:t>
-            </a:r>
-          </a:p>
-        </p:txBody>
-      </p:sp>
-      <p:sp>
-        <p:nvSpPr>
-          <p:cNvPr id="4" name="Slide Number Placeholder 3"/>
-          <p:cNvSpPr>
-            <a:spLocks noGrp="1"/>
-          </p:cNvSpPr>
-          <p:nvPr>
-            <p:ph type="sldNum" idx="5" sz="quarter"/>
-          </p:nvPr>
-        </p:nvSpPr>
-        <p:spPr/>
-      </p:sp>
-    </p:spTree>
-  </p:cSld>
-  <p:clrMapOvr>
-    <a:masterClrMapping/>
-  </p:clrMapOvr>
-</p:notes>
-</file>
-
-<file path=ppt/notesSlides/notesSlide2.xml><?xml version="1.0" encoding="utf-8"?>
-<p:notes xmlns:a="http://schemas.openxmlformats.org/drawingml/2006/main" xmlns:p="http://schemas.openxmlformats.org/presentationml/2006/main" xmlns:r="http://schemas.openxmlformats.org/officeDocument/2006/relationships">
-  <p:cSld>
-    <p:spTree>
-      <p:nvGrpSpPr>
-        <p:cNvPr id="1" name=""/>
-        <p:cNvGrpSpPr/>
-        <p:nvPr/>
-      </p:nvGrpSpPr>
-      <p:grpSpPr>
-        <a:xfrm>
-          <a:off x="0" y="0"/>
-          <a:ext cx="0" cy="0"/>
-          <a:chOff x="0" y="0"/>
-          <a:chExt cx="0" cy="0"/>
-        </a:xfrm>
-      </p:grpSpPr>
-      <p:sp>
-        <p:nvSpPr>
-          <p:cNvPr id="2" name="Slide Image Placeholder 1"/>
-          <p:cNvSpPr>
-            <a:spLocks noGrp="1"/>
-          </p:cNvSpPr>
-          <p:nvPr>
-            <p:ph type="sldImg" idx="2"/>
-          </p:nvPr>
-        </p:nvSpPr>
-        <p:spPr/>
-      </p:sp>
-      <p:sp>
-        <p:nvSpPr>
-          <p:cNvPr id="3" name="Notes Placeholder 2"/>
-          <p:cNvSpPr>
-            <a:spLocks noGrp="1"/>
-          </p:cNvSpPr>
-          <p:nvPr>
-            <p:ph type="body" idx="3" sz="quarter"/>
-          </p:nvPr>
-        </p:nvSpPr>
-        <p:spPr/>
-        <p:txBody>
-          <a:bodyPr/>
-          <a:lstStyle/>
-          <a:p>
-            <a:r>
-              <a:t>3 minutos. Sin apuntes. Es para recordar, no cuenta para nota.</a:t>
-            </a:r>
-          </a:p>
-        </p:txBody>
-      </p:sp>
-      <p:sp>
-        <p:nvSpPr>
-          <p:cNvPr id="4" name="Slide Number Placeholder 3"/>
-          <p:cNvSpPr>
-            <a:spLocks noGrp="1"/>
-          </p:cNvSpPr>
-          <p:nvPr>
-            <p:ph type="sldNum" idx="5" sz="quarter"/>
-          </p:nvPr>
-        </p:nvSpPr>
-        <p:spPr/>
-      </p:sp>
-    </p:spTree>
-  </p:cSld>
-  <p:clrMapOvr>
-    <a:masterClrMapping/>
-  </p:clrMapOvr>
-</p:notes>
-</file>
-
-<file path=ppt/notesSlides/notesSlide3.xml><?xml version="1.0" encoding="utf-8"?>
-<p:notes xmlns:a="http://schemas.openxmlformats.org/drawingml/2006/main" xmlns:p="http://schemas.openxmlformats.org/presentationml/2006/main" xmlns:r="http://schemas.openxmlformats.org/officeDocument/2006/relationships">
-  <p:cSld>
-    <p:spTree>
-      <p:nvGrpSpPr>
-        <p:cNvPr id="1" name=""/>
-        <p:cNvGrpSpPr/>
-        <p:nvPr/>
-      </p:nvGrpSpPr>
-      <p:grpSpPr>
-        <a:xfrm>
-          <a:off x="0" y="0"/>
-          <a:ext cx="0" cy="0"/>
-          <a:chOff x="0" y="0"/>
-          <a:chExt cx="0" cy="0"/>
-        </a:xfrm>
-      </p:grpSpPr>
-      <p:sp>
-        <p:nvSpPr>
-          <p:cNvPr id="2" name="Slide Image Placeholder 1"/>
-          <p:cNvSpPr>
-            <a:spLocks noGrp="1"/>
-          </p:cNvSpPr>
-          <p:nvPr>
-            <p:ph type="sldImg" idx="2"/>
-          </p:nvPr>
-        </p:nvSpPr>
-        <p:spPr/>
-      </p:sp>
-      <p:sp>
-        <p:nvSpPr>
-          <p:cNvPr id="3" name="Notes Placeholder 2"/>
-          <p:cNvSpPr>
-            <a:spLocks noGrp="1"/>
-          </p:cNvSpPr>
-          <p:nvPr>
-            <p:ph type="body" idx="3" sz="quarter"/>
-          </p:nvPr>
-        </p:nvSpPr>
-        <p:spPr/>
-        <p:txBody>
-          <a:bodyPr/>
-          <a:lstStyle/>
-          <a:p>
-            <a:r>
-              <a:t>Nadie tiene que contestar: solo pensarlo.</a:t>
-            </a:r>
-          </a:p>
-        </p:txBody>
-      </p:sp>
-      <p:sp>
-        <p:nvSpPr>
-          <p:cNvPr id="4" name="Slide Number Placeholder 3"/>
-          <p:cNvSpPr>
-            <a:spLocks noGrp="1"/>
-          </p:cNvSpPr>
-          <p:nvPr>
-            <p:ph type="sldNum" idx="5" sz="quarter"/>
-          </p:nvPr>
-        </p:nvSpPr>
-        <p:spPr/>
-      </p:sp>
-    </p:spTree>
-  </p:cSld>
-  <p:clrMapOvr>
-    <a:masterClrMapping/>
-  </p:clrMapOvr>
-</p:notes>
-</file>
-
-<file path=ppt/notesSlides/notesSlide4.xml><?xml version="1.0" encoding="utf-8"?>
-<p:notes xmlns:a="http://schemas.openxmlformats.org/drawingml/2006/main" xmlns:p="http://schemas.openxmlformats.org/presentationml/2006/main" xmlns:r="http://schemas.openxmlformats.org/officeDocument/2006/relationships">
-  <p:cSld>
-    <p:spTree>
-      <p:nvGrpSpPr>
-        <p:cNvPr id="1" name=""/>
-        <p:cNvGrpSpPr/>
-        <p:nvPr/>
-      </p:nvGrpSpPr>
-      <p:grpSpPr>
-        <a:xfrm>
-          <a:off x="0" y="0"/>
-          <a:ext cx="0" cy="0"/>
-          <a:chOff x="0" y="0"/>
-          <a:chExt cx="0" cy="0"/>
-        </a:xfrm>
-      </p:grpSpPr>
-      <p:sp>
-        <p:nvSpPr>
-          <p:cNvPr id="2" name="Slide Image Placeholder 1"/>
-          <p:cNvSpPr>
-            <a:spLocks noGrp="1"/>
-          </p:cNvSpPr>
-          <p:nvPr>
-            <p:ph type="sldImg" idx="2"/>
-          </p:nvPr>
-        </p:nvSpPr>
-        <p:spPr/>
-      </p:sp>
-      <p:sp>
-        <p:nvSpPr>
-          <p:cNvPr id="3" name="Notes Placeholder 2"/>
-          <p:cNvSpPr>
-            <a:spLocks noGrp="1"/>
-          </p:cNvSpPr>
-          <p:nvPr>
-            <p:ph type="body" idx="3" sz="quarter"/>
-          </p:nvPr>
-        </p:nvSpPr>
-        <p:spPr/>
-        <p:txBody>
-          <a:bodyPr/>
-          <a:lstStyle/>
-          <a:p>
-            <a:r>
-              <a:t>Dejar unos segundos para que piensen la respuesta fácil antes de enseñar los pasos.</a:t>
-            </a:r>
-          </a:p>
-        </p:txBody>
-      </p:sp>
-      <p:sp>
-        <p:nvSpPr>
-          <p:cNvPr id="4" name="Slide Number Placeholder 3"/>
-          <p:cNvSpPr>
-            <a:spLocks noGrp="1"/>
-          </p:cNvSpPr>
-          <p:nvPr>
-            <p:ph type="sldNum" idx="5" sz="quarter"/>
-          </p:nvPr>
-        </p:nvSpPr>
-        <p:spPr/>
-      </p:sp>
-    </p:spTree>
-  </p:cSld>
-  <p:clrMapOvr>
-    <a:masterClrMapping/>
-  </p:clrMapOvr>
-</p:notes>
-</file>
-
-<file path=ppt/notesSlides/notesSlide5.xml><?xml version="1.0" encoding="utf-8"?>
-<p:notes xmlns:a="http://schemas.openxmlformats.org/drawingml/2006/main" xmlns:p="http://schemas.openxmlformats.org/presentationml/2006/main" xmlns:r="http://schemas.openxmlformats.org/officeDocument/2006/relationships">
-  <p:cSld>
-    <p:spTree>
-      <p:nvGrpSpPr>
-        <p:cNvPr id="1" name=""/>
-        <p:cNvGrpSpPr/>
-        <p:nvPr/>
-      </p:nvGrpSpPr>
-      <p:grpSpPr>
-        <a:xfrm>
-          <a:off x="0" y="0"/>
-          <a:ext cx="0" cy="0"/>
-          <a:chOff x="0" y="0"/>
-          <a:chExt cx="0" cy="0"/>
-        </a:xfrm>
-      </p:grpSpPr>
-      <p:sp>
-        <p:nvSpPr>
-          <p:cNvPr id="2" name="Slide Image Placeholder 1"/>
-          <p:cNvSpPr>
-            <a:spLocks noGrp="1"/>
-          </p:cNvSpPr>
-          <p:nvPr>
-            <p:ph type="sldImg" idx="2"/>
-          </p:nvPr>
-        </p:nvSpPr>
-        <p:spPr/>
-      </p:sp>
-      <p:sp>
-        <p:nvSpPr>
-          <p:cNvPr id="3" name="Notes Placeholder 2"/>
-          <p:cNvSpPr>
-            <a:spLocks noGrp="1"/>
-          </p:cNvSpPr>
-          <p:nvPr>
-            <p:ph type="body" idx="3" sz="quarter"/>
-          </p:nvPr>
-        </p:nvSpPr>
-        <p:spPr/>
-        <p:txBody>
-          <a:bodyPr/>
-          <a:lstStyle/>
-          <a:p>
-            <a:r>
-              <a:t>Dejar 2 minutos para que lo escriban. La diapositiva siguiente muestra el resumen.</a:t>
-            </a:r>
-          </a:p>
-        </p:txBody>
-      </p:sp>
-      <p:sp>
-        <p:nvSpPr>
-          <p:cNvPr id="4" name="Slide Number Placeholder 3"/>
-          <p:cNvSpPr>
-            <a:spLocks noGrp="1"/>
-          </p:cNvSpPr>
-          <p:nvPr>
-            <p:ph type="sldNum" idx="5" sz="quarter"/>
-          </p:nvPr>
-        </p:nvSpPr>
-        <p:spPr/>
-      </p:sp>
-    </p:spTree>
-  </p:cSld>
-  <p:clrMapOvr>
-    <a:masterClrMapping/>
-  </p:clrMapOvr>
-</p:notes>
-</file>
-
-<file path=ppt/notesSlides/notesSlide6.xml><?xml version="1.0" encoding="utf-8"?>
-<p:notes xmlns:a="http://schemas.openxmlformats.org/drawingml/2006/main" xmlns:p="http://schemas.openxmlformats.org/presentationml/2006/main" xmlns:r="http://schemas.openxmlformats.org/officeDocument/2006/relationships">
-  <p:cSld>
-    <p:spTree>
-      <p:nvGrpSpPr>
-        <p:cNvPr id="1" name=""/>
-        <p:cNvGrpSpPr/>
-        <p:nvPr/>
-      </p:nvGrpSpPr>
-      <p:grpSpPr>
-        <a:xfrm>
-          <a:off x="0" y="0"/>
-          <a:ext cx="0" cy="0"/>
-          <a:chOff x="0" y="0"/>
-          <a:chExt cx="0" cy="0"/>
-        </a:xfrm>
-      </p:grpSpPr>
-      <p:sp>
-        <p:nvSpPr>
-          <p:cNvPr id="2" name="Slide Image Placeholder 1"/>
-          <p:cNvSpPr>
-            <a:spLocks noGrp="1"/>
-          </p:cNvSpPr>
-          <p:nvPr>
-            <p:ph type="sldImg" idx="2"/>
-          </p:nvPr>
-        </p:nvSpPr>
-        <p:spPr/>
-      </p:sp>
-      <p:sp>
-        <p:nvSpPr>
-          <p:cNvPr id="3" name="Notes Placeholder 2"/>
-          <p:cNvSpPr>
-            <a:spLocks noGrp="1"/>
-          </p:cNvSpPr>
-          <p:nvPr>
-            <p:ph type="body" idx="3" sz="quarter"/>
-          </p:nvPr>
-        </p:nvSpPr>
-        <p:spPr/>
-        <p:txBody>
-          <a:bodyPr/>
-          <a:lstStyle/>
-          <a:p>
-            <a:r>
-              <a:t>Buscar: «premisas y conclusión de un argumento» · «indicadores de premisa y conclusión»</a:t>
-            </a:r>
-          </a:p>
-        </p:txBody>
-      </p:sp>
-      <p:sp>
-        <p:nvSpPr>
-          <p:cNvPr id="4" name="Slide Number Placeholder 3"/>
-          <p:cNvSpPr>
-            <a:spLocks noGrp="1"/>
-          </p:cNvSpPr>
-          <p:nvPr>
-            <p:ph type="sldNum" idx="5" sz="quarter"/>
-          </p:nvPr>
-        </p:nvSpPr>
-        <p:spPr/>
-      </p:sp>
-    </p:spTree>
-  </p:cSld>
-  <p:clrMapOvr>
-    <a:masterClrMapping/>
-  </p:clrMapOvr>
-</p:notes>
 </file>
 
 <file path=ppt/slideLayouts/slideLayout1.xml><?xml version="1.0" encoding="utf-8"?>

--- a/curso/pptx/S07.pptx
+++ b/curso/pptx/S07.pptx
@@ -4806,7 +4806,7 @@
                 </a:solidFill>
                 <a:latin typeface="Nunito Sans"/>
               </a:rPr>
-              <a:t>Leire entra en clase empapada. Aitor le pregunta qué ha pasado. Leire: «Estoy empapada porque me ha pillado la tormenta».</a:t>
+              <a:t>Una chica entra en clase empapada. Un chico le pregunta qué ha pasado. La chica: «Estoy empapada porque me ha pillado la tormenta».</a:t>
             </a:r>
           </a:p>
         </p:txBody>
@@ -4879,7 +4879,7 @@
                 </a:solidFill>
                 <a:latin typeface="Nunito Sans"/>
               </a:rPr>
-              <a:t>Aitor ya ve que está empapada: no hace falta convencerle de eso.</a:t>
+              <a:t>El chico ya ve que está empapada: no hace falta convencerle de eso.</a:t>
             </a:r>
           </a:p>
           <a:p>
@@ -4904,7 +4904,7 @@
                 </a:solidFill>
                 <a:latin typeface="Nunito Sans"/>
               </a:rPr>
-              <a:t>Leire no quiere que acepte nada: le </a:t>
+              <a:t>La chica no quiere que acepte nada: le </a:t>
             </a:r>
             <a:r>
               <a:rPr sz="2400" b="1">
@@ -7596,7 +7596,7 @@
                           </a:solidFill>
                           <a:latin typeface="Nunito Sans"/>
                         </a:rPr>
-                        <a:t>«Naiara paró tres penaltis, así que debería jugar de portera.»</a:t>
+                        <a:t>«Una chica paró tres penaltis, así que debería jugar de portera.»</a:t>
                       </a:r>
                     </a:p>
                   </a:txBody>

--- a/curso/pptx/S07.pptx
+++ b/curso/pptx/S07.pptx
@@ -22,7 +22,6 @@
     <p:sldId id="270" r:id="rId22"/>
     <p:sldId id="271" r:id="rId23"/>
     <p:sldId id="272" r:id="rId24"/>
-    <p:sldId id="273" r:id="rId25"/>
   </p:sldIdLst>
   <p:sldSz cx="12192000" cy="6858000" type="screen4x3"/>
   <p:notesSz cx="6858000" cy="9144000"/>
@@ -3536,7 +3535,7 @@
                 </a:solidFill>
                 <a:latin typeface="Nunito Sans"/>
               </a:rPr>
-              <a:t>PENSAMIENTO CRÍTICO · SESIÓN 7 · UNIDAD 2 · ARGUMENTAR</a:t>
+              <a:t>PENSAMIENTO CRÍTICO · SESIÓN 7 · UNIDAD 2 · AUTORIDAD E INFLUENCIA</a:t>
             </a:r>
           </a:p>
         </p:txBody>
@@ -3575,7 +3574,7 @@
                 </a:solidFill>
                 <a:latin typeface="Fredoka"/>
               </a:rPr>
-              <a:t>¿Qué es un argumento?</a:t>
+              <a:t>¿Cuándo fiarse de un experto?</a:t>
             </a:r>
           </a:p>
         </p:txBody>
@@ -3614,7 +3613,7 @@
                 </a:solidFill>
                 <a:latin typeface="Nunito Sans"/>
               </a:rPr>
-              <a:t>Un argumento es una conclusión apoyada en premisas; palabras como «porque» o «por tanto» ayudan a encontrar cada parte.</a:t>
+              <a:t>Antes de fiarte de un experto, mira cuatro cosas: su campo, el consenso, sus intereses y sus pruebas.</a:t>
             </a:r>
           </a:p>
         </p:txBody>
@@ -3633,7 +3632,7 @@
     <p:bg>
       <p:bgPr>
         <a:solidFill>
-          <a:srgbClr val="1F2A44"/>
+          <a:srgbClr val="FBF7EF"/>
         </a:solidFill>
         <a:effectLst/>
       </p:bgPr>
@@ -3653,8 +3652,8 @@
         </p:nvSpPr>
         <p:spPr>
           <a:xfrm>
-            <a:off x="640000" y="2300000"/>
-            <a:ext cx="10912000" cy="500000"/>
+            <a:off x="640000" y="380000"/>
+            <a:ext cx="10912000" cy="420000"/>
           </a:xfrm>
           <a:prstGeom prst="rect">
             <a:avLst/>
@@ -3669,17 +3668,17 @@
           <a:p>
             <a:pPr>
               <a:spcAft>
-                <a:spcPts val="810"/>
+                <a:spcPts val="630"/>
               </a:spcAft>
             </a:pPr>
             <a:r>
-              <a:rPr sz="1800" b="1">
-                <a:solidFill>
-                  <a:srgbClr val="F4B183"/>
-                </a:solidFill>
-                <a:latin typeface="Nunito Sans"/>
-              </a:rPr>
-              <a:t>BLOQUE 2</a:t>
+              <a:rPr sz="1400" b="1">
+                <a:solidFill>
+                  <a:srgbClr val="E8793A"/>
+                </a:solidFill>
+                <a:latin typeface="Nunito Sans"/>
+              </a:rPr>
+              <a:t>BLOQUE 2 · CASOS RESUELTOS</a:t>
             </a:r>
           </a:p>
         </p:txBody>
@@ -3692,7 +3691,7 @@
         </p:nvSpPr>
         <p:spPr>
           <a:xfrm>
-            <a:off x="640000" y="2800000"/>
+            <a:off x="640000" y="760000"/>
             <a:ext cx="10912000" cy="800000"/>
           </a:xfrm>
           <a:prstGeom prst="rect">
@@ -3708,17 +3707,222 @@
           <a:p>
             <a:pPr>
               <a:spcAft>
-                <a:spcPts val="2160"/>
+                <a:spcPts val="1710"/>
               </a:spcAft>
             </a:pPr>
             <a:r>
-              <a:rPr sz="4800" b="1">
-                <a:solidFill>
-                  <a:srgbClr val="FBF7EF"/>
+              <a:rPr sz="3800" b="1">
+                <a:solidFill>
+                  <a:srgbClr val="1F2A44"/>
                 </a:solidFill>
                 <a:latin typeface="Fredoka"/>
               </a:rPr>
-              <a:t>Casos resueltos</a:t>
+              <a:t>Caso 1 · La dentista de Instagram</a:t>
+            </a:r>
+          </a:p>
+        </p:txBody>
+      </p:sp>
+      <p:sp>
+        <p:nvSpPr>
+          <p:cNvPr id="4" name="Rectangle 3"/>
+          <p:cNvSpPr/>
+          <p:nvPr/>
+        </p:nvSpPr>
+        <p:spPr>
+          <a:xfrm>
+            <a:off x="640000" y="1600000"/>
+            <a:ext cx="10912000" cy="1100000"/>
+          </a:xfrm>
+          <a:prstGeom prst="rect">
+            <a:avLst/>
+          </a:prstGeom>
+          <a:solidFill>
+            <a:srgbClr val="FFFFFF"/>
+          </a:solidFill>
+          <a:ln>
+            <a:noFill/>
+          </a:ln>
+        </p:spPr>
+        <p:style>
+          <a:lnRef idx="1">
+            <a:schemeClr val="accent1"/>
+          </a:lnRef>
+          <a:fillRef idx="3">
+            <a:schemeClr val="accent1"/>
+          </a:fillRef>
+          <a:effectRef idx="2">
+            <a:schemeClr val="accent1"/>
+          </a:effectRef>
+          <a:fontRef idx="minor">
+            <a:schemeClr val="lt1"/>
+          </a:fontRef>
+        </p:style>
+        <p:txBody>
+          <a:bodyPr rtlCol="0" anchor="ctr"/>
+          <a:lstStyle/>
+          <a:p>
+            <a:pPr algn="ctr"/>
+          </a:p>
+        </p:txBody>
+      </p:sp>
+      <p:sp>
+        <p:nvSpPr>
+          <p:cNvPr id="5" name="TextBox 4"/>
+          <p:cNvSpPr txBox="1"/>
+          <p:nvPr/>
+        </p:nvSpPr>
+        <p:spPr>
+          <a:xfrm>
+            <a:off x="840000" y="1650000"/>
+            <a:ext cx="10512000" cy="1000000"/>
+          </a:xfrm>
+          <a:prstGeom prst="rect">
+            <a:avLst/>
+          </a:prstGeom>
+          <a:noFill/>
+        </p:spPr>
+        <p:txBody>
+          <a:bodyPr wrap="square" anchor="ctr">
+            <a:spAutoFit/>
+          </a:bodyPr>
+          <a:lstStyle/>
+          <a:p>
+            <a:pPr>
+              <a:spcAft>
+                <a:spcPts val="1170"/>
+              </a:spcAft>
+            </a:pPr>
+            <a:r>
+              <a:rPr sz="2600" b="1">
+                <a:solidFill>
+                  <a:srgbClr val="1F2A44"/>
+                </a:solidFill>
+                <a:latin typeface="Nunito Sans"/>
+              </a:rPr>
+              <a:t>Una dentista dice en Instagram que un dentífrico es «el mejor del mundo». Debajo pone: «colaboración pagada».</a:t>
+            </a:r>
+          </a:p>
+        </p:txBody>
+      </p:sp>
+      <p:sp>
+        <p:nvSpPr>
+          <p:cNvPr id="6" name="TextBox 5"/>
+          <p:cNvSpPr txBox="1"/>
+          <p:nvPr/>
+        </p:nvSpPr>
+        <p:spPr>
+          <a:xfrm>
+            <a:off x="640000" y="2900000"/>
+            <a:ext cx="10912000" cy="3500000"/>
+          </a:xfrm>
+          <a:prstGeom prst="rect">
+            <a:avLst/>
+          </a:prstGeom>
+          <a:noFill/>
+        </p:spPr>
+        <p:txBody>
+          <a:bodyPr wrap="square">
+            <a:spAutoFit/>
+          </a:bodyPr>
+          <a:lstStyle/>
+          <a:p>
+            <a:pPr>
+              <a:spcAft>
+                <a:spcPts val="1080"/>
+              </a:spcAft>
+            </a:pPr>
+            <a:r>
+              <a:rPr sz="2400" b="1">
+                <a:solidFill>
+                  <a:srgbClr val="E8793A"/>
+                </a:solidFill>
+                <a:latin typeface="Nunito Sans"/>
+              </a:rPr>
+              <a:t>1. </a:t>
+            </a:r>
+            <a:r>
+              <a:rPr sz="2400" b="0">
+                <a:solidFill>
+                  <a:srgbClr val="1F2A44"/>
+                </a:solidFill>
+                <a:latin typeface="Nunito Sans"/>
+              </a:rPr>
+              <a:t>¿Su campo? Sí: es dentista y habla de dientes.</a:t>
+            </a:r>
+          </a:p>
+          <a:p>
+            <a:pPr>
+              <a:spcAft>
+                <a:spcPts val="1080"/>
+              </a:spcAft>
+            </a:pPr>
+            <a:r>
+              <a:rPr sz="2400" b="1">
+                <a:solidFill>
+                  <a:srgbClr val="E8793A"/>
+                </a:solidFill>
+                <a:latin typeface="Nunito Sans"/>
+              </a:rPr>
+              <a:t>2. </a:t>
+            </a:r>
+            <a:r>
+              <a:rPr sz="2400" b="0">
+                <a:solidFill>
+                  <a:srgbClr val="1F2A44"/>
+                </a:solidFill>
+                <a:latin typeface="Nunito Sans"/>
+              </a:rPr>
+              <a:t>¿Sus intereses? Le pagan por decirlo. No quiere decir que mienta, pero hay que mirar con más cuidado.</a:t>
+            </a:r>
+          </a:p>
+          <a:p>
+            <a:pPr>
+              <a:spcAft>
+                <a:spcPts val="1080"/>
+              </a:spcAft>
+            </a:pPr>
+            <a:r>
+              <a:rPr sz="2400" b="1">
+                <a:solidFill>
+                  <a:srgbClr val="E8793A"/>
+                </a:solidFill>
+                <a:latin typeface="Nunito Sans"/>
+              </a:rPr>
+              <a:t>3. </a:t>
+            </a:r>
+            <a:r>
+              <a:rPr sz="2400" b="0">
+                <a:solidFill>
+                  <a:srgbClr val="1F2A44"/>
+                </a:solidFill>
+                <a:latin typeface="Nunito Sans"/>
+              </a:rPr>
+              <a:t>¿Sus pruebas? No dice cómo lo sabe. «El mejor del mundo» no se puede medir así.</a:t>
+            </a:r>
+          </a:p>
+          <a:p>
+            <a:pPr>
+              <a:spcAft>
+                <a:spcPts val="1080"/>
+              </a:spcAft>
+            </a:pPr>
+            <a:r>
+              <a:rPr sz="2400" b="1">
+                <a:solidFill>
+                  <a:srgbClr val="E8793A"/>
+                </a:solidFill>
+                <a:latin typeface="Nunito Sans"/>
+              </a:rPr>
+              <a:t>4. </a:t>
+            </a:r>
+            <a:r>
+              <a:rPr sz="2400" b="0">
+                <a:solidFill>
+                  <a:srgbClr val="1F2A44"/>
+                </a:solidFill>
+                <a:latin typeface="Nunito Sans"/>
+              </a:rPr>
+              <a:t>Conclusión: sabe del tema, pero tiene un interés. Mejor preguntar a una dentista que no cobre por anunciarlo.</a:t>
             </a:r>
           </a:p>
         </p:txBody>
@@ -3822,7 +4026,7 @@
                 </a:solidFill>
                 <a:latin typeface="Fredoka"/>
               </a:rPr>
-              <a:t>Caso 1 · La conclusión va primero</a:t>
+              <a:t>Caso 2 · Un genio fuera de su campo</a:t>
             </a:r>
           </a:p>
         </p:txBody>
@@ -3904,7 +4108,7 @@
                 </a:solidFill>
                 <a:latin typeface="Nunito Sans"/>
               </a:rPr>
-              <a:t>«Tenemos que salir ya, porque el partido empieza a las seis y el metro tarda veinte minutos.»</a:t>
+              <a:t>Imagina que un premio Nobel de Física dice en una entrevista que comer ajo crudo cura el resfriado.</a:t>
             </a:r>
           </a:p>
         </p:txBody>
@@ -3952,7 +4156,7 @@
                 </a:solidFill>
                 <a:latin typeface="Nunito Sans"/>
               </a:rPr>
-              <a:t>Busco el indicador: «porque». Lo que va detrás son premisas.</a:t>
+              <a:t>¿Su campo? No: sabe muchísimo de física, no de medicina.</a:t>
             </a:r>
           </a:p>
           <a:p>
@@ -3977,7 +4181,7 @@
                 </a:solidFill>
                 <a:latin typeface="Nunito Sans"/>
               </a:rPr>
-              <a:t>Premisas: el partido empieza a las seis; el metro tarda veinte minutos.</a:t>
+              <a:t>¿El consenso? Los médicos no dicen que el ajo cure el resfriado.</a:t>
             </a:r>
           </a:p>
           <a:p>
@@ -4002,7 +4206,7 @@
                 </a:solidFill>
                 <a:latin typeface="Nunito Sans"/>
               </a:rPr>
-              <a:t>Lo que va delante es lo que quiere que acepte: tenemos que salir ya.</a:t>
+              <a:t>¿Sus pruebas? No da ninguna: solo su opinión.</a:t>
             </a:r>
           </a:p>
           <a:p>
@@ -4027,7 +4231,7 @@
                 </a:solidFill>
                 <a:latin typeface="Nunito Sans"/>
               </a:rPr>
-              <a:t>Conclusión: la conclusión no siempre va al final. Lo que manda es qué apoya a qué.</a:t>
+              <a:t>Conclusión: es un gran experto, pero no en esto. En este tema, su palabra no vale más que la de cualquiera.</a:t>
             </a:r>
           </a:p>
         </p:txBody>
@@ -4131,7 +4335,7 @@
                 </a:solidFill>
                 <a:latin typeface="Fredoka"/>
               </a:rPr>
-              <a:t>Caso 2 · Sin indicadores</a:t>
+              <a:t>Caso 3 · La vacuna</a:t>
             </a:r>
           </a:p>
         </p:txBody>
@@ -4213,7 +4417,7 @@
                 </a:solidFill>
                 <a:latin typeface="Nunito Sans"/>
               </a:rPr>
-              <a:t>«Esa cuenta se creó ayer y no dice de dónde saca las imágenes. Ese vídeo puede ser falso.»</a:t>
+              <a:t>El pediatra de un chico le recomienda una vacuna. Lo mismo dicen Sanidad y casi todos los médicos.</a:t>
             </a:r>
           </a:p>
         </p:txBody>
@@ -4261,7 +4465,7 @@
                 </a:solidFill>
                 <a:latin typeface="Nunito Sans"/>
               </a:rPr>
-              <a:t>No hay «porque» ni «por tanto». Me pregunto: ¿qué quiere que acepte?</a:t>
+              <a:t>¿Su campo? Sí: es médico de niños y habla de salud.</a:t>
             </a:r>
           </a:p>
           <a:p>
@@ -4286,7 +4490,7 @@
                 </a:solidFill>
                 <a:latin typeface="Nunito Sans"/>
               </a:rPr>
-              <a:t>Que el vídeo puede ser falso: esa es la conclusión.</a:t>
+              <a:t>¿El consenso? Sí: casi todos los expertos dicen lo mismo.</a:t>
             </a:r>
           </a:p>
           <a:p>
@@ -4311,7 +4515,7 @@
                 </a:solidFill>
                 <a:latin typeface="Nunito Sans"/>
               </a:rPr>
-              <a:t>¿Qué da para apoyarlo? La cuenta es nueva y no dice de dónde saca las imágenes: son las premisas.</a:t>
+              <a:t>¿Sus intereses y pruebas? No cobra más por recomendarla, y hay muchos estudios detrás.</a:t>
             </a:r>
           </a:p>
           <a:p>
@@ -4336,7 +4540,7 @@
                 </a:solidFill>
                 <a:latin typeface="Nunito Sans"/>
               </a:rPr>
-              <a:t>Conclusión: sin indicadores, pregunto «¿qué apoya a qué?».</a:t>
+              <a:t>Conclusión: pasa las cuatro preguntas. Fiarse aquí es razonable.</a:t>
             </a:r>
           </a:p>
         </p:txBody>
@@ -4350,6 +4554,340 @@
 </file>
 
 <file path=ppt/slides/slide13.xml><?xml version="1.0" encoding="utf-8"?>
+<p:sld xmlns:a="http://schemas.openxmlformats.org/drawingml/2006/main" xmlns:p="http://schemas.openxmlformats.org/presentationml/2006/main" xmlns:r="http://schemas.openxmlformats.org/officeDocument/2006/relationships">
+  <p:cSld>
+    <p:bg>
+      <p:bgPr>
+        <a:solidFill>
+          <a:srgbClr val="F6C9A8"/>
+        </a:solidFill>
+        <a:effectLst/>
+      </p:bgPr>
+    </p:bg>
+    <p:spTree>
+      <p:nvGrpSpPr>
+        <p:cNvPr id="1" name=""/>
+        <p:cNvGrpSpPr/>
+        <p:nvPr/>
+      </p:nvGrpSpPr>
+      <p:grpSpPr/>
+      <p:sp>
+        <p:nvSpPr>
+          <p:cNvPr id="2" name="TextBox 1"/>
+          <p:cNvSpPr txBox="1"/>
+          <p:nvPr/>
+        </p:nvSpPr>
+        <p:spPr>
+          <a:xfrm>
+            <a:off x="640000" y="380000"/>
+            <a:ext cx="10912000" cy="420000"/>
+          </a:xfrm>
+          <a:prstGeom prst="rect">
+            <a:avLst/>
+          </a:prstGeom>
+          <a:noFill/>
+        </p:spPr>
+        <p:txBody>
+          <a:bodyPr wrap="square">
+            <a:spAutoFit/>
+          </a:bodyPr>
+          <a:lstStyle/>
+          <a:p>
+            <a:pPr>
+              <a:spcAft>
+                <a:spcPts val="630"/>
+              </a:spcAft>
+            </a:pPr>
+            <a:r>
+              <a:rPr sz="1400" b="1">
+                <a:solidFill>
+                  <a:srgbClr val="1F2A44"/>
+                </a:solidFill>
+                <a:latin typeface="Nunito Sans"/>
+              </a:rPr>
+              <a:t>CASO TRAMPA · BLOQUE 2 · CASOS RESUELTOS</a:t>
+            </a:r>
+          </a:p>
+        </p:txBody>
+      </p:sp>
+      <p:sp>
+        <p:nvSpPr>
+          <p:cNvPr id="3" name="TextBox 2"/>
+          <p:cNvSpPr txBox="1"/>
+          <p:nvPr/>
+        </p:nvSpPr>
+        <p:spPr>
+          <a:xfrm>
+            <a:off x="640000" y="760000"/>
+            <a:ext cx="10912000" cy="800000"/>
+          </a:xfrm>
+          <a:prstGeom prst="rect">
+            <a:avLst/>
+          </a:prstGeom>
+          <a:noFill/>
+        </p:spPr>
+        <p:txBody>
+          <a:bodyPr wrap="square">
+            <a:spAutoFit/>
+          </a:bodyPr>
+          <a:lstStyle/>
+          <a:p>
+            <a:pPr>
+              <a:spcAft>
+                <a:spcPts val="1710"/>
+              </a:spcAft>
+            </a:pPr>
+            <a:r>
+              <a:rPr sz="3800" b="1">
+                <a:solidFill>
+                  <a:srgbClr val="1F2A44"/>
+                </a:solidFill>
+                <a:latin typeface="Fredoka"/>
+              </a:rPr>
+              <a:t>⚠ Contra el consenso</a:t>
+            </a:r>
+          </a:p>
+        </p:txBody>
+      </p:sp>
+      <p:sp>
+        <p:nvSpPr>
+          <p:cNvPr id="4" name="Rectangle 3"/>
+          <p:cNvSpPr/>
+          <p:nvPr/>
+        </p:nvSpPr>
+        <p:spPr>
+          <a:xfrm>
+            <a:off x="640000" y="1600000"/>
+            <a:ext cx="10912000" cy="1100000"/>
+          </a:xfrm>
+          <a:prstGeom prst="rect">
+            <a:avLst/>
+          </a:prstGeom>
+          <a:solidFill>
+            <a:srgbClr val="FBF7EF"/>
+          </a:solidFill>
+          <a:ln>
+            <a:noFill/>
+          </a:ln>
+        </p:spPr>
+        <p:style>
+          <a:lnRef idx="1">
+            <a:schemeClr val="accent1"/>
+          </a:lnRef>
+          <a:fillRef idx="3">
+            <a:schemeClr val="accent1"/>
+          </a:fillRef>
+          <a:effectRef idx="2">
+            <a:schemeClr val="accent1"/>
+          </a:effectRef>
+          <a:fontRef idx="minor">
+            <a:schemeClr val="lt1"/>
+          </a:fontRef>
+        </p:style>
+        <p:txBody>
+          <a:bodyPr rtlCol="0" anchor="ctr"/>
+          <a:lstStyle/>
+          <a:p>
+            <a:pPr algn="ctr"/>
+          </a:p>
+        </p:txBody>
+      </p:sp>
+      <p:sp>
+        <p:nvSpPr>
+          <p:cNvPr id="5" name="TextBox 4"/>
+          <p:cNvSpPr txBox="1"/>
+          <p:nvPr/>
+        </p:nvSpPr>
+        <p:spPr>
+          <a:xfrm>
+            <a:off x="840000" y="1650000"/>
+            <a:ext cx="10512000" cy="1000000"/>
+          </a:xfrm>
+          <a:prstGeom prst="rect">
+            <a:avLst/>
+          </a:prstGeom>
+          <a:noFill/>
+        </p:spPr>
+        <p:txBody>
+          <a:bodyPr wrap="square" anchor="ctr">
+            <a:spAutoFit/>
+          </a:bodyPr>
+          <a:lstStyle/>
+          <a:p>
+            <a:pPr>
+              <a:spcAft>
+                <a:spcPts val="1170"/>
+              </a:spcAft>
+            </a:pPr>
+            <a:r>
+              <a:rPr sz="2600" b="1">
+                <a:solidFill>
+                  <a:srgbClr val="1F2A44"/>
+                </a:solidFill>
+                <a:latin typeface="Nunito Sans"/>
+              </a:rPr>
+              <a:t>Años 80: casi todos los médicos creen que las úlceras de estómago vienen del estrés. Barry Marshall dice que las causa una bacteria.</a:t>
+            </a:r>
+          </a:p>
+        </p:txBody>
+      </p:sp>
+      <p:sp>
+        <p:nvSpPr>
+          <p:cNvPr id="6" name="TextBox 5"/>
+          <p:cNvSpPr txBox="1"/>
+          <p:nvPr/>
+        </p:nvSpPr>
+        <p:spPr>
+          <a:xfrm>
+            <a:off x="640000" y="2900000"/>
+            <a:ext cx="10912000" cy="3500000"/>
+          </a:xfrm>
+          <a:prstGeom prst="rect">
+            <a:avLst/>
+          </a:prstGeom>
+          <a:noFill/>
+        </p:spPr>
+        <p:txBody>
+          <a:bodyPr wrap="square">
+            <a:spAutoFit/>
+          </a:bodyPr>
+          <a:lstStyle/>
+          <a:p>
+            <a:pPr>
+              <a:spcAft>
+                <a:spcPts val="1080"/>
+              </a:spcAft>
+            </a:pPr>
+            <a:r>
+              <a:rPr sz="2400" b="1">
+                <a:solidFill>
+                  <a:srgbClr val="E8793A"/>
+                </a:solidFill>
+                <a:latin typeface="Nunito Sans"/>
+              </a:rPr>
+              <a:t>1. </a:t>
+            </a:r>
+            <a:r>
+              <a:rPr sz="2400" b="0">
+                <a:solidFill>
+                  <a:srgbClr val="1F2A44"/>
+                </a:solidFill>
+                <a:latin typeface="Nunito Sans"/>
+              </a:rPr>
+              <a:t>Va contra el consenso… ¿entonces seguro que se equivoca?</a:t>
+            </a:r>
+          </a:p>
+          <a:p>
+            <a:pPr>
+              <a:spcAft>
+                <a:spcPts val="1080"/>
+              </a:spcAft>
+            </a:pPr>
+            <a:r>
+              <a:rPr sz="2400" b="1">
+                <a:solidFill>
+                  <a:srgbClr val="E8793A"/>
+                </a:solidFill>
+                <a:latin typeface="Nunito Sans"/>
+              </a:rPr>
+              <a:t>2. </a:t>
+            </a:r>
+            <a:r>
+              <a:rPr sz="2400" b="0">
+                <a:solidFill>
+                  <a:srgbClr val="1F2A44"/>
+                </a:solidFill>
+                <a:latin typeface="Nunito Sans"/>
+              </a:rPr>
+              <a:t>Casi siempre, quien va contra el consenso se equivoca. Pero no siempre.</a:t>
+            </a:r>
+          </a:p>
+          <a:p>
+            <a:pPr>
+              <a:spcAft>
+                <a:spcPts val="1080"/>
+              </a:spcAft>
+            </a:pPr>
+            <a:r>
+              <a:rPr sz="2400" b="1">
+                <a:solidFill>
+                  <a:srgbClr val="E8793A"/>
+                </a:solidFill>
+                <a:latin typeface="Nunito Sans"/>
+              </a:rPr>
+              <a:t>3. </a:t>
+            </a:r>
+            <a:r>
+              <a:rPr sz="2400" b="0">
+                <a:solidFill>
+                  <a:srgbClr val="1F2A44"/>
+                </a:solidFill>
+                <a:latin typeface="Nunito Sans"/>
+              </a:rPr>
+              <a:t>Marshall tenía pruebas: encontró la bacteria con Robin Warren. Él mismo se la bebió para demostrarlo.</a:t>
+            </a:r>
+          </a:p>
+          <a:p>
+            <a:pPr>
+              <a:spcAft>
+                <a:spcPts val="1080"/>
+              </a:spcAft>
+            </a:pPr>
+            <a:r>
+              <a:rPr sz="2400" b="1">
+                <a:solidFill>
+                  <a:srgbClr val="E8793A"/>
+                </a:solidFill>
+                <a:latin typeface="Nunito Sans"/>
+              </a:rPr>
+              <a:t>4. </a:t>
+            </a:r>
+            <a:r>
+              <a:rPr sz="2400" b="0">
+                <a:solidFill>
+                  <a:srgbClr val="1F2A44"/>
+                </a:solidFill>
+                <a:latin typeface="Nunito Sans"/>
+              </a:rPr>
+              <a:t>Otros comprobaron sus pruebas y el consenso cambió. En 2005 les dieron el Nobel.</a:t>
+            </a:r>
+          </a:p>
+          <a:p>
+            <a:pPr>
+              <a:spcAft>
+                <a:spcPts val="1080"/>
+              </a:spcAft>
+            </a:pPr>
+            <a:r>
+              <a:rPr sz="2400" b="1">
+                <a:solidFill>
+                  <a:srgbClr val="E8793A"/>
+                </a:solidFill>
+                <a:latin typeface="Nunito Sans"/>
+              </a:rPr>
+              <a:t>5. </a:t>
+            </a:r>
+            <a:r>
+              <a:rPr sz="2400" b="0">
+                <a:solidFill>
+                  <a:srgbClr val="1F2A44"/>
+                </a:solidFill>
+                <a:latin typeface="Nunito Sans"/>
+              </a:rPr>
+              <a:t>Conclusión: el consenso es una muy buena razón, pero no es infalible. Lo que lo cambia son pruebas, no opiniones.</a:t>
+            </a:r>
+          </a:p>
+        </p:txBody>
+      </p:sp>
+    </p:spTree>
+  </p:cSld>
+  <p:clrMapOvr>
+    <a:masterClrMapping/>
+  </p:clrMapOvr>
+</p:sld>
+</file>
+
+<file path=ppt/slides/slide14.xml><?xml version="1.0" encoding="utf-8"?>
 <p:sld xmlns:a="http://schemas.openxmlformats.org/drawingml/2006/main" xmlns:p="http://schemas.openxmlformats.org/presentationml/2006/main" xmlns:r="http://schemas.openxmlformats.org/officeDocument/2006/relationships">
   <p:cSld>
     <p:bg>
@@ -4401,7 +4939,7 @@
                 </a:solidFill>
                 <a:latin typeface="Nunito Sans"/>
               </a:rPr>
-              <a:t>BLOQUE 2 · CASOS RESUELTOS</a:t>
+              <a:t>LO DE HOY EN TRES LÍNEAS</a:t>
             </a:r>
           </a:p>
         </p:txBody>
@@ -4440,64 +4978,21 @@
                 </a:solidFill>
                 <a:latin typeface="Fredoka"/>
               </a:rPr>
-              <a:t>Caso 3 · ¿Argumento o no?</a:t>
-            </a:r>
-          </a:p>
-        </p:txBody>
-      </p:sp>
-      <p:sp>
-        <p:nvSpPr>
-          <p:cNvPr id="4" name="Rectangle 3"/>
-          <p:cNvSpPr/>
-          <p:nvPr/>
-        </p:nvSpPr>
-        <p:spPr>
-          <a:xfrm>
-            <a:off x="640000" y="1600000"/>
-            <a:ext cx="10912000" cy="1100000"/>
-          </a:xfrm>
-          <a:prstGeom prst="rect">
-            <a:avLst/>
-          </a:prstGeom>
-          <a:solidFill>
-            <a:srgbClr val="FFFFFF"/>
-          </a:solidFill>
-          <a:ln>
-            <a:noFill/>
-          </a:ln>
-        </p:spPr>
-        <p:style>
-          <a:lnRef idx="1">
-            <a:schemeClr val="accent1"/>
-          </a:lnRef>
-          <a:fillRef idx="3">
-            <a:schemeClr val="accent1"/>
-          </a:fillRef>
-          <a:effectRef idx="2">
-            <a:schemeClr val="accent1"/>
-          </a:effectRef>
-          <a:fontRef idx="minor">
-            <a:schemeClr val="lt1"/>
-          </a:fontRef>
-        </p:style>
-        <p:txBody>
-          <a:bodyPr rtlCol="0" anchor="ctr"/>
-          <a:lstStyle/>
-          <a:p>
-            <a:pPr algn="ctr"/>
-          </a:p>
-        </p:txBody>
-      </p:sp>
-      <p:sp>
-        <p:nvSpPr>
-          <p:cNvPr id="5" name="TextBox 4"/>
+              <a:t>Escríbelo tú primero, sin mirar</a:t>
+            </a:r>
+          </a:p>
+        </p:txBody>
+      </p:sp>
+      <p:sp>
+        <p:nvSpPr>
+          <p:cNvPr id="4" name="TextBox 3"/>
           <p:cNvSpPr txBox="1"/>
           <p:nvPr/>
         </p:nvSpPr>
         <p:spPr>
           <a:xfrm>
-            <a:off x="840000" y="1650000"/>
-            <a:ext cx="10512000" cy="1000000"/>
+            <a:off x="640000" y="1800000"/>
+            <a:ext cx="10912000" cy="1500000"/>
           </a:xfrm>
           <a:prstGeom prst="rect">
             <a:avLst/>
@@ -4505,7 +5000,7 @@
           <a:noFill/>
         </p:spPr>
         <p:txBody>
-          <a:bodyPr wrap="square" anchor="ctr">
+          <a:bodyPr wrap="square">
             <a:spAutoFit/>
           </a:bodyPr>
           <a:lstStyle/>
@@ -4516,481 +5011,13 @@
               </a:spcAft>
             </a:pPr>
             <a:r>
-              <a:rPr sz="2600" b="1">
-                <a:solidFill>
-                  <a:srgbClr val="1F2A44"/>
-                </a:solidFill>
-                <a:latin typeface="Nunito Sans"/>
-              </a:rPr>
-              <a:t>«Aste Nagusia es en agosto. Hay txosnas, conciertos y fuegos artificiales.»</a:t>
-            </a:r>
-          </a:p>
-        </p:txBody>
-      </p:sp>
-      <p:sp>
-        <p:nvSpPr>
-          <p:cNvPr id="6" name="TextBox 5"/>
-          <p:cNvSpPr txBox="1"/>
-          <p:nvPr/>
-        </p:nvSpPr>
-        <p:spPr>
-          <a:xfrm>
-            <a:off x="640000" y="2900000"/>
-            <a:ext cx="10912000" cy="3500000"/>
-          </a:xfrm>
-          <a:prstGeom prst="rect">
-            <a:avLst/>
-          </a:prstGeom>
-          <a:noFill/>
-        </p:spPr>
-        <p:txBody>
-          <a:bodyPr wrap="square">
-            <a:spAutoFit/>
-          </a:bodyPr>
-          <a:lstStyle/>
-          <a:p>
-            <a:pPr>
-              <a:spcAft>
-                <a:spcPts val="1080"/>
-              </a:spcAft>
-            </a:pPr>
-            <a:r>
-              <a:rPr sz="2400" b="1">
-                <a:solidFill>
-                  <a:srgbClr val="E8793A"/>
-                </a:solidFill>
-                <a:latin typeface="Nunito Sans"/>
-              </a:rPr>
-              <a:t>1. </a:t>
-            </a:r>
-            <a:r>
-              <a:rPr sz="2400" b="0">
-                <a:solidFill>
-                  <a:srgbClr val="1F2A44"/>
-                </a:solidFill>
-                <a:latin typeface="Nunito Sans"/>
-              </a:rPr>
-              <a:t>¿Hay algo que quiera que acepte? No: solo cuenta cosas.</a:t>
-            </a:r>
-          </a:p>
-          <a:p>
-            <a:pPr>
-              <a:spcAft>
-                <a:spcPts val="1080"/>
-              </a:spcAft>
-            </a:pPr>
-            <a:r>
-              <a:rPr sz="2400" b="1">
-                <a:solidFill>
-                  <a:srgbClr val="E8793A"/>
-                </a:solidFill>
-                <a:latin typeface="Nunito Sans"/>
-              </a:rPr>
-              <a:t>2. </a:t>
-            </a:r>
-            <a:r>
-              <a:rPr sz="2400" b="0">
-                <a:solidFill>
-                  <a:srgbClr val="1F2A44"/>
-                </a:solidFill>
-                <a:latin typeface="Nunito Sans"/>
-              </a:rPr>
-              <a:t>¿Alguna frase apoya a otra? No: son datos sueltos.</a:t>
-            </a:r>
-          </a:p>
-          <a:p>
-            <a:pPr>
-              <a:spcAft>
-                <a:spcPts val="1080"/>
-              </a:spcAft>
-            </a:pPr>
-            <a:r>
-              <a:rPr sz="2400" b="1">
-                <a:solidFill>
-                  <a:srgbClr val="E8793A"/>
-                </a:solidFill>
-                <a:latin typeface="Nunito Sans"/>
-              </a:rPr>
-              <a:t>3. </a:t>
-            </a:r>
-            <a:r>
-              <a:rPr sz="2400" b="0">
-                <a:solidFill>
-                  <a:srgbClr val="1F2A44"/>
-                </a:solidFill>
-                <a:latin typeface="Nunito Sans"/>
-              </a:rPr>
-              <a:t>Conclusión: no es un argumento. Es una descripción.</a:t>
-            </a:r>
-          </a:p>
-        </p:txBody>
-      </p:sp>
-    </p:spTree>
-  </p:cSld>
-  <p:clrMapOvr>
-    <a:masterClrMapping/>
-  </p:clrMapOvr>
-</p:sld>
-</file>
-
-<file path=ppt/slides/slide14.xml><?xml version="1.0" encoding="utf-8"?>
-<p:sld xmlns:a="http://schemas.openxmlformats.org/drawingml/2006/main" xmlns:p="http://schemas.openxmlformats.org/presentationml/2006/main" xmlns:r="http://schemas.openxmlformats.org/officeDocument/2006/relationships">
-  <p:cSld>
-    <p:bg>
-      <p:bgPr>
-        <a:solidFill>
-          <a:srgbClr val="F6C9A8"/>
-        </a:solidFill>
-        <a:effectLst/>
-      </p:bgPr>
-    </p:bg>
-    <p:spTree>
-      <p:nvGrpSpPr>
-        <p:cNvPr id="1" name=""/>
-        <p:cNvGrpSpPr/>
-        <p:nvPr/>
-      </p:nvGrpSpPr>
-      <p:grpSpPr/>
-      <p:sp>
-        <p:nvSpPr>
-          <p:cNvPr id="2" name="TextBox 1"/>
-          <p:cNvSpPr txBox="1"/>
-          <p:nvPr/>
-        </p:nvSpPr>
-        <p:spPr>
-          <a:xfrm>
-            <a:off x="640000" y="380000"/>
-            <a:ext cx="10912000" cy="420000"/>
-          </a:xfrm>
-          <a:prstGeom prst="rect">
-            <a:avLst/>
-          </a:prstGeom>
-          <a:noFill/>
-        </p:spPr>
-        <p:txBody>
-          <a:bodyPr wrap="square">
-            <a:spAutoFit/>
-          </a:bodyPr>
-          <a:lstStyle/>
-          <a:p>
-            <a:pPr>
-              <a:spcAft>
-                <a:spcPts val="630"/>
-              </a:spcAft>
-            </a:pPr>
-            <a:r>
-              <a:rPr sz="1400" b="1">
-                <a:solidFill>
-                  <a:srgbClr val="1F2A44"/>
-                </a:solidFill>
-                <a:latin typeface="Nunito Sans"/>
-              </a:rPr>
-              <a:t>CASO TRAMPA · BLOQUE 2 · CASOS RESUELTOS</a:t>
-            </a:r>
-          </a:p>
-        </p:txBody>
-      </p:sp>
-      <p:sp>
-        <p:nvSpPr>
-          <p:cNvPr id="3" name="TextBox 2"/>
-          <p:cNvSpPr txBox="1"/>
-          <p:nvPr/>
-        </p:nvSpPr>
-        <p:spPr>
-          <a:xfrm>
-            <a:off x="640000" y="760000"/>
-            <a:ext cx="10912000" cy="800000"/>
-          </a:xfrm>
-          <a:prstGeom prst="rect">
-            <a:avLst/>
-          </a:prstGeom>
-          <a:noFill/>
-        </p:spPr>
-        <p:txBody>
-          <a:bodyPr wrap="square">
-            <a:spAutoFit/>
-          </a:bodyPr>
-          <a:lstStyle/>
-          <a:p>
-            <a:pPr>
-              <a:spcAft>
-                <a:spcPts val="1710"/>
-              </a:spcAft>
-            </a:pPr>
-            <a:r>
-              <a:rPr sz="3800" b="1">
-                <a:solidFill>
-                  <a:srgbClr val="1F2A44"/>
-                </a:solidFill>
-                <a:latin typeface="Fredoka"/>
-              </a:rPr>
-              <a:t>⚠ Un «porque» que no es premisa</a:t>
-            </a:r>
-          </a:p>
-        </p:txBody>
-      </p:sp>
-      <p:sp>
-        <p:nvSpPr>
-          <p:cNvPr id="4" name="Rectangle 3"/>
-          <p:cNvSpPr/>
-          <p:nvPr/>
-        </p:nvSpPr>
-        <p:spPr>
-          <a:xfrm>
-            <a:off x="640000" y="1600000"/>
-            <a:ext cx="10912000" cy="1100000"/>
-          </a:xfrm>
-          <a:prstGeom prst="rect">
-            <a:avLst/>
-          </a:prstGeom>
-          <a:solidFill>
-            <a:srgbClr val="FBF7EF"/>
-          </a:solidFill>
-          <a:ln>
-            <a:noFill/>
-          </a:ln>
-        </p:spPr>
-        <p:style>
-          <a:lnRef idx="1">
-            <a:schemeClr val="accent1"/>
-          </a:lnRef>
-          <a:fillRef idx="3">
-            <a:schemeClr val="accent1"/>
-          </a:fillRef>
-          <a:effectRef idx="2">
-            <a:schemeClr val="accent1"/>
-          </a:effectRef>
-          <a:fontRef idx="minor">
-            <a:schemeClr val="lt1"/>
-          </a:fontRef>
-        </p:style>
-        <p:txBody>
-          <a:bodyPr rtlCol="0" anchor="ctr"/>
-          <a:lstStyle/>
-          <a:p>
-            <a:pPr algn="ctr"/>
-          </a:p>
-        </p:txBody>
-      </p:sp>
-      <p:sp>
-        <p:nvSpPr>
-          <p:cNvPr id="5" name="TextBox 4"/>
-          <p:cNvSpPr txBox="1"/>
-          <p:nvPr/>
-        </p:nvSpPr>
-        <p:spPr>
-          <a:xfrm>
-            <a:off x="840000" y="1650000"/>
-            <a:ext cx="10512000" cy="1000000"/>
-          </a:xfrm>
-          <a:prstGeom prst="rect">
-            <a:avLst/>
-          </a:prstGeom>
-          <a:noFill/>
-        </p:spPr>
-        <p:txBody>
-          <a:bodyPr wrap="square" anchor="ctr">
-            <a:spAutoFit/>
-          </a:bodyPr>
-          <a:lstStyle/>
-          <a:p>
-            <a:pPr>
-              <a:spcAft>
-                <a:spcPts val="1170"/>
-              </a:spcAft>
-            </a:pPr>
-            <a:r>
-              <a:rPr sz="2600" b="1">
-                <a:solidFill>
-                  <a:srgbClr val="1F2A44"/>
-                </a:solidFill>
-                <a:latin typeface="Nunito Sans"/>
-              </a:rPr>
-              <a:t>Una chica entra en clase empapada. Un chico le pregunta qué ha pasado. La chica: «Estoy empapada porque me ha pillado la tormenta».</a:t>
-            </a:r>
-          </a:p>
-        </p:txBody>
-      </p:sp>
-      <p:sp>
-        <p:nvSpPr>
-          <p:cNvPr id="6" name="TextBox 5"/>
-          <p:cNvSpPr txBox="1"/>
-          <p:nvPr/>
-        </p:nvSpPr>
-        <p:spPr>
-          <a:xfrm>
-            <a:off x="640000" y="2900000"/>
-            <a:ext cx="10912000" cy="3500000"/>
-          </a:xfrm>
-          <a:prstGeom prst="rect">
-            <a:avLst/>
-          </a:prstGeom>
-          <a:noFill/>
-        </p:spPr>
-        <p:txBody>
-          <a:bodyPr wrap="square">
-            <a:spAutoFit/>
-          </a:bodyPr>
-          <a:lstStyle/>
-          <a:p>
-            <a:pPr>
-              <a:spcAft>
-                <a:spcPts val="1080"/>
-              </a:spcAft>
-            </a:pPr>
-            <a:r>
-              <a:rPr sz="2400" b="1">
-                <a:solidFill>
-                  <a:srgbClr val="E8793A"/>
-                </a:solidFill>
-                <a:latin typeface="Nunito Sans"/>
-              </a:rPr>
-              <a:t>1. </a:t>
-            </a:r>
-            <a:r>
-              <a:rPr sz="2400" b="0">
-                <a:solidFill>
-                  <a:srgbClr val="1F2A44"/>
-                </a:solidFill>
-                <a:latin typeface="Nunito Sans"/>
-              </a:rPr>
-              <a:t>Lleva «porque». ¿Es un argumento? ¿Cuál es la premisa?</a:t>
-            </a:r>
-          </a:p>
-          <a:p>
-            <a:pPr>
-              <a:spcAft>
-                <a:spcPts val="1080"/>
-              </a:spcAft>
-            </a:pPr>
-            <a:r>
-              <a:rPr sz="2400" b="1">
-                <a:solidFill>
-                  <a:srgbClr val="E8793A"/>
-                </a:solidFill>
-                <a:latin typeface="Nunito Sans"/>
-              </a:rPr>
-              <a:t>2. </a:t>
-            </a:r>
-            <a:r>
-              <a:rPr sz="2400" b="0">
-                <a:solidFill>
-                  <a:srgbClr val="1F2A44"/>
-                </a:solidFill>
-                <a:latin typeface="Nunito Sans"/>
-              </a:rPr>
-              <a:t>El chico ya ve que está empapada: no hace falta convencerle de eso.</a:t>
-            </a:r>
-          </a:p>
-          <a:p>
-            <a:pPr>
-              <a:spcAft>
-                <a:spcPts val="1080"/>
-              </a:spcAft>
-            </a:pPr>
-            <a:r>
-              <a:rPr sz="2400" b="1">
-                <a:solidFill>
-                  <a:srgbClr val="E8793A"/>
-                </a:solidFill>
-                <a:latin typeface="Nunito Sans"/>
-              </a:rPr>
-              <a:t>3. </a:t>
-            </a:r>
-            <a:r>
-              <a:rPr sz="2400" b="0">
-                <a:solidFill>
-                  <a:srgbClr val="1F2A44"/>
-                </a:solidFill>
-                <a:latin typeface="Nunito Sans"/>
-              </a:rPr>
-              <a:t>La chica no quiere que acepte nada: le </a:t>
-            </a:r>
-            <a:r>
-              <a:rPr sz="2400" b="1">
-                <a:solidFill>
-                  <a:srgbClr val="1F2A44"/>
-                </a:solidFill>
-                <a:latin typeface="Nunito Sans"/>
-              </a:rPr>
-              <a:t>explica</a:t>
-            </a:r>
-            <a:r>
-              <a:rPr sz="2400" b="0">
-                <a:solidFill>
-                  <a:srgbClr val="1F2A44"/>
-                </a:solidFill>
-                <a:latin typeface="Nunito Sans"/>
-              </a:rPr>
-              <a:t> por qué ha pasado.</a:t>
-            </a:r>
-          </a:p>
-          <a:p>
-            <a:pPr>
-              <a:spcAft>
-                <a:spcPts val="1080"/>
-              </a:spcAft>
-            </a:pPr>
-            <a:r>
-              <a:rPr sz="2400" b="1">
-                <a:solidFill>
-                  <a:srgbClr val="E8793A"/>
-                </a:solidFill>
-                <a:latin typeface="Nunito Sans"/>
-              </a:rPr>
-              <a:t>4. </a:t>
-            </a:r>
-            <a:r>
-              <a:rPr sz="2400" b="0">
-                <a:solidFill>
-                  <a:srgbClr val="1F2A44"/>
-                </a:solidFill>
-                <a:latin typeface="Nunito Sans"/>
-              </a:rPr>
-              <a:t>Ese «porque» da una </a:t>
-            </a:r>
-            <a:r>
-              <a:rPr sz="2400" b="1">
-                <a:solidFill>
-                  <a:srgbClr val="1F2A44"/>
-                </a:solidFill>
-                <a:latin typeface="Nunito Sans"/>
-              </a:rPr>
-              <a:t>causa</a:t>
-            </a:r>
-            <a:r>
-              <a:rPr sz="2400" b="0">
-                <a:solidFill>
-                  <a:srgbClr val="1F2A44"/>
-                </a:solidFill>
-                <a:latin typeface="Nunito Sans"/>
-              </a:rPr>
-              <a:t>, no una razón para creer algo.</a:t>
-            </a:r>
-          </a:p>
-          <a:p>
-            <a:pPr>
-              <a:spcAft>
-                <a:spcPts val="1080"/>
-              </a:spcAft>
-            </a:pPr>
-            <a:r>
-              <a:rPr sz="2400" b="1">
-                <a:solidFill>
-                  <a:srgbClr val="E8793A"/>
-                </a:solidFill>
-                <a:latin typeface="Nunito Sans"/>
-              </a:rPr>
-              <a:t>5. </a:t>
-            </a:r>
-            <a:r>
-              <a:rPr sz="2400" b="0">
-                <a:solidFill>
-                  <a:srgbClr val="1F2A44"/>
-                </a:solidFill>
-                <a:latin typeface="Nunito Sans"/>
-              </a:rPr>
-              <a:t>Conclusión: no es un argumento, es una explicación. Los indicadores ayudan, pero hay que pensar.</a:t>
+              <a:rPr sz="2600" b="0">
+                <a:solidFill>
+                  <a:srgbClr val="4A5568"/>
+                </a:solidFill>
+                <a:latin typeface="Nunito Sans"/>
+              </a:rPr>
+              <a:t>Dos minutos. Después lo comparamos.</a:t>
             </a:r>
           </a:p>
         </p:txBody>
@@ -5068,8 +5095,8 @@
         </p:nvSpPr>
         <p:spPr>
           <a:xfrm>
-            <a:off x="640000" y="760000"/>
-            <a:ext cx="10912000" cy="800000"/>
+            <a:off x="640000" y="1300000"/>
+            <a:ext cx="10912000" cy="4800000"/>
           </a:xfrm>
           <a:prstGeom prst="rect">
             <a:avLst/>
@@ -5084,56 +5111,76 @@
           <a:p>
             <a:pPr>
               <a:spcAft>
-                <a:spcPts val="1710"/>
+                <a:spcPts val="1350"/>
               </a:spcAft>
             </a:pPr>
             <a:r>
-              <a:rPr sz="3800" b="1">
+              <a:rPr sz="3000" b="1">
+                <a:solidFill>
+                  <a:srgbClr val="E8793A"/>
+                </a:solidFill>
+                <a:latin typeface="Nunito Sans"/>
+              </a:rPr>
+              <a:t>1. </a:t>
+            </a:r>
+            <a:r>
+              <a:rPr sz="3000" b="0">
                 <a:solidFill>
                   <a:srgbClr val="1F2A44"/>
                 </a:solidFill>
-                <a:latin typeface="Fredoka"/>
-              </a:rPr>
-              <a:t>Escríbelo tú primero, sin mirar</a:t>
-            </a:r>
-          </a:p>
-        </p:txBody>
-      </p:sp>
-      <p:sp>
-        <p:nvSpPr>
-          <p:cNvPr id="4" name="TextBox 3"/>
-          <p:cNvSpPr txBox="1"/>
-          <p:nvPr/>
-        </p:nvSpPr>
-        <p:spPr>
-          <a:xfrm>
-            <a:off x="640000" y="1800000"/>
-            <a:ext cx="10912000" cy="1500000"/>
-          </a:xfrm>
-          <a:prstGeom prst="rect">
-            <a:avLst/>
-          </a:prstGeom>
-          <a:noFill/>
-        </p:spPr>
-        <p:txBody>
-          <a:bodyPr wrap="square">
-            <a:spAutoFit/>
-          </a:bodyPr>
-          <a:lstStyle/>
+                <a:latin typeface="Nunito Sans"/>
+              </a:rPr>
+              <a:t>Un experto sabe mucho de su tema, pero no de todos.</a:t>
+            </a:r>
+          </a:p>
           <a:p>
             <a:pPr>
               <a:spcAft>
-                <a:spcPts val="1170"/>
+                <a:spcPts val="1350"/>
               </a:spcAft>
             </a:pPr>
             <a:r>
-              <a:rPr sz="2600" b="0">
-                <a:solidFill>
-                  <a:srgbClr val="4A5568"/>
-                </a:solidFill>
-                <a:latin typeface="Nunito Sans"/>
-              </a:rPr>
-              <a:t>Dos minutos. Después lo comparamos.</a:t>
+              <a:rPr sz="3000" b="1">
+                <a:solidFill>
+                  <a:srgbClr val="E8793A"/>
+                </a:solidFill>
+                <a:latin typeface="Nunito Sans"/>
+              </a:rPr>
+              <a:t>2. </a:t>
+            </a:r>
+            <a:r>
+              <a:rPr sz="3000" b="0">
+                <a:solidFill>
+                  <a:srgbClr val="1F2A44"/>
+                </a:solidFill>
+                <a:latin typeface="Nunito Sans"/>
+              </a:rPr>
+              <a:t>Antes de fiarte, mira su campo, el consenso, sus intereses y sus pruebas.</a:t>
+            </a:r>
+          </a:p>
+          <a:p>
+            <a:pPr>
+              <a:spcAft>
+                <a:spcPts val="1350"/>
+              </a:spcAft>
+            </a:pPr>
+            <a:r>
+              <a:rPr sz="3000" b="1">
+                <a:solidFill>
+                  <a:srgbClr val="E8793A"/>
+                </a:solidFill>
+                <a:latin typeface="Nunito Sans"/>
+              </a:rPr>
+              <a:t>3. </a:t>
+            </a:r>
+            <a:r>
+              <a:rPr sz="3000" b="0">
+                <a:solidFill>
+                  <a:srgbClr val="1F2A44"/>
+                </a:solidFill>
+                <a:latin typeface="Nunito Sans"/>
+              </a:rPr>
+              <a:t>Si pasa las cuatro preguntas, fiarse es razonable, aunque los expertos también pueden fallar.</a:t>
             </a:r>
           </a:p>
         </p:txBody>
@@ -5152,7 +5199,7 @@
     <p:bg>
       <p:bgPr>
         <a:solidFill>
-          <a:srgbClr val="FBF7EF"/>
+          <a:srgbClr val="1F2A44"/>
         </a:solidFill>
         <a:effectLst/>
       </p:bgPr>
@@ -5194,11 +5241,11 @@
             <a:r>
               <a:rPr sz="1400" b="1">
                 <a:solidFill>
-                  <a:srgbClr val="E8793A"/>
-                </a:solidFill>
-                <a:latin typeface="Nunito Sans"/>
-              </a:rPr>
-              <a:t>LO DE HOY EN TRES LÍNEAS</a:t>
+                  <a:srgbClr val="F4B183"/>
+                </a:solidFill>
+                <a:latin typeface="Nunito Sans"/>
+              </a:rPr>
+              <a:t>VÍDEO</a:t>
             </a:r>
           </a:p>
         </p:txBody>
@@ -5211,8 +5258,8 @@
         </p:nvSpPr>
         <p:spPr>
           <a:xfrm>
-            <a:off x="640000" y="1300000"/>
-            <a:ext cx="10912000" cy="4800000"/>
+            <a:off x="640000" y="760000"/>
+            <a:ext cx="10912000" cy="800000"/>
           </a:xfrm>
           <a:prstGeom prst="rect">
             <a:avLst/>
@@ -5227,76 +5274,56 @@
           <a:p>
             <a:pPr>
               <a:spcAft>
-                <a:spcPts val="1350"/>
+                <a:spcPts val="1620"/>
               </a:spcAft>
             </a:pPr>
             <a:r>
-              <a:rPr sz="3000" b="1">
-                <a:solidFill>
-                  <a:srgbClr val="E8793A"/>
-                </a:solidFill>
-                <a:latin typeface="Nunito Sans"/>
-              </a:rPr>
-              <a:t>1. </a:t>
-            </a:r>
-            <a:r>
-              <a:rPr sz="3000" b="0">
-                <a:solidFill>
-                  <a:srgbClr val="1F2A44"/>
-                </a:solidFill>
-                <a:latin typeface="Nunito Sans"/>
-              </a:rPr>
-              <a:t>Un argumento es una conclusión apoyada en premisas, que son las razones.</a:t>
-            </a:r>
-          </a:p>
+              <a:rPr sz="3600" b="1">
+                <a:solidFill>
+                  <a:srgbClr val="FBF7EF"/>
+                </a:solidFill>
+                <a:latin typeface="Fredoka"/>
+              </a:rPr>
+              <a:t>Cómo saber si podemos fiarnos de un experto</a:t>
+            </a:r>
+          </a:p>
+        </p:txBody>
+      </p:sp>
+      <p:sp>
+        <p:nvSpPr>
+          <p:cNvPr id="4" name="TextBox 3"/>
+          <p:cNvSpPr txBox="1"/>
+          <p:nvPr/>
+        </p:nvSpPr>
+        <p:spPr>
+          <a:xfrm>
+            <a:off x="640000" y="2200000"/>
+            <a:ext cx="10912000" cy="2000000"/>
+          </a:xfrm>
+          <a:prstGeom prst="rect">
+            <a:avLst/>
+          </a:prstGeom>
+          <a:noFill/>
+        </p:spPr>
+        <p:txBody>
+          <a:bodyPr wrap="square">
+            <a:spAutoFit/>
+          </a:bodyPr>
+          <a:lstStyle/>
           <a:p>
             <a:pPr>
               <a:spcAft>
-                <a:spcPts val="1350"/>
+                <a:spcPts val="1080"/>
               </a:spcAft>
             </a:pPr>
             <a:r>
-              <a:rPr sz="3000" b="1">
-                <a:solidFill>
-                  <a:srgbClr val="E8793A"/>
-                </a:solidFill>
-                <a:latin typeface="Nunito Sans"/>
-              </a:rPr>
-              <a:t>2. </a:t>
-            </a:r>
-            <a:r>
-              <a:rPr sz="3000" b="0">
-                <a:solidFill>
-                  <a:srgbClr val="1F2A44"/>
-                </a:solidFill>
-                <a:latin typeface="Nunito Sans"/>
-              </a:rPr>
-              <a:t>Indicadores como «porque» o «por tanto» ayudan a encontrar cada parte.</a:t>
-            </a:r>
-          </a:p>
-          <a:p>
-            <a:pPr>
-              <a:spcAft>
-                <a:spcPts val="1350"/>
-              </a:spcAft>
-            </a:pPr>
-            <a:r>
-              <a:rPr sz="3000" b="1">
-                <a:solidFill>
-                  <a:srgbClr val="E8793A"/>
-                </a:solidFill>
-                <a:latin typeface="Nunito Sans"/>
-              </a:rPr>
-              <a:t>3. </a:t>
-            </a:r>
-            <a:r>
-              <a:rPr sz="3000" b="0">
-                <a:solidFill>
-                  <a:srgbClr val="1F2A44"/>
-                </a:solidFill>
-                <a:latin typeface="Nunito Sans"/>
-              </a:rPr>
-              <a:t>La conclusión no siempre va al final: pregunta qué apoya a qué.</a:t>
+              <a:rPr sz="2400" b="0">
+                <a:solidFill>
+                  <a:srgbClr val="C9D3E6"/>
+                </a:solidFill>
+                <a:latin typeface="Nunito Sans"/>
+              </a:rPr>
+              <a:t>Que vean que fiarse de los expertos es razonable si se mira su campo, el consenso y sus pruebas.</a:t>
             </a:r>
           </a:p>
         </p:txBody>
@@ -5361,149 +5388,6 @@
                 </a:solidFill>
                 <a:latin typeface="Nunito Sans"/>
               </a:rPr>
-              <a:t>VÍDEO</a:t>
-            </a:r>
-          </a:p>
-        </p:txBody>
-      </p:sp>
-      <p:sp>
-        <p:nvSpPr>
-          <p:cNvPr id="3" name="TextBox 2"/>
-          <p:cNvSpPr txBox="1"/>
-          <p:nvPr/>
-        </p:nvSpPr>
-        <p:spPr>
-          <a:xfrm>
-            <a:off x="640000" y="760000"/>
-            <a:ext cx="10912000" cy="800000"/>
-          </a:xfrm>
-          <a:prstGeom prst="rect">
-            <a:avLst/>
-          </a:prstGeom>
-          <a:noFill/>
-        </p:spPr>
-        <p:txBody>
-          <a:bodyPr wrap="square">
-            <a:spAutoFit/>
-          </a:bodyPr>
-          <a:lstStyle/>
-          <a:p>
-            <a:pPr>
-              <a:spcAft>
-                <a:spcPts val="1620"/>
-              </a:spcAft>
-            </a:pPr>
-            <a:r>
-              <a:rPr sz="3600" b="1">
-                <a:solidFill>
-                  <a:srgbClr val="FBF7EF"/>
-                </a:solidFill>
-                <a:latin typeface="Fredoka"/>
-              </a:rPr>
-              <a:t>Premisas y conclusión de un argumento</a:t>
-            </a:r>
-          </a:p>
-        </p:txBody>
-      </p:sp>
-      <p:sp>
-        <p:nvSpPr>
-          <p:cNvPr id="4" name="TextBox 3"/>
-          <p:cNvSpPr txBox="1"/>
-          <p:nvPr/>
-        </p:nvSpPr>
-        <p:spPr>
-          <a:xfrm>
-            <a:off x="640000" y="2200000"/>
-            <a:ext cx="10912000" cy="2000000"/>
-          </a:xfrm>
-          <a:prstGeom prst="rect">
-            <a:avLst/>
-          </a:prstGeom>
-          <a:noFill/>
-        </p:spPr>
-        <p:txBody>
-          <a:bodyPr wrap="square">
-            <a:spAutoFit/>
-          </a:bodyPr>
-          <a:lstStyle/>
-          <a:p>
-            <a:pPr>
-              <a:spcAft>
-                <a:spcPts val="1080"/>
-              </a:spcAft>
-            </a:pPr>
-            <a:r>
-              <a:rPr sz="2400" b="0">
-                <a:solidFill>
-                  <a:srgbClr val="C9D3E6"/>
-                </a:solidFill>
-                <a:latin typeface="Nunito Sans"/>
-              </a:rPr>
-              <a:t>Oír otra explicación de premisas, conclusión e indicadores, con ejemplos sencillos.</a:t>
-            </a:r>
-          </a:p>
-        </p:txBody>
-      </p:sp>
-    </p:spTree>
-  </p:cSld>
-  <p:clrMapOvr>
-    <a:masterClrMapping/>
-  </p:clrMapOvr>
-</p:sld>
-</file>
-
-<file path=ppt/slides/slide18.xml><?xml version="1.0" encoding="utf-8"?>
-<p:sld xmlns:a="http://schemas.openxmlformats.org/drawingml/2006/main" xmlns:p="http://schemas.openxmlformats.org/presentationml/2006/main" xmlns:r="http://schemas.openxmlformats.org/officeDocument/2006/relationships">
-  <p:cSld>
-    <p:bg>
-      <p:bgPr>
-        <a:solidFill>
-          <a:srgbClr val="1F2A44"/>
-        </a:solidFill>
-        <a:effectLst/>
-      </p:bgPr>
-    </p:bg>
-    <p:spTree>
-      <p:nvGrpSpPr>
-        <p:cNvPr id="1" name=""/>
-        <p:cNvGrpSpPr/>
-        <p:nvPr/>
-      </p:nvGrpSpPr>
-      <p:grpSpPr/>
-      <p:sp>
-        <p:nvSpPr>
-          <p:cNvPr id="2" name="TextBox 1"/>
-          <p:cNvSpPr txBox="1"/>
-          <p:nvPr/>
-        </p:nvSpPr>
-        <p:spPr>
-          <a:xfrm>
-            <a:off x="640000" y="380000"/>
-            <a:ext cx="10912000" cy="420000"/>
-          </a:xfrm>
-          <a:prstGeom prst="rect">
-            <a:avLst/>
-          </a:prstGeom>
-          <a:noFill/>
-        </p:spPr>
-        <p:txBody>
-          <a:bodyPr wrap="square">
-            <a:spAutoFit/>
-          </a:bodyPr>
-          <a:lstStyle/>
-          <a:p>
-            <a:pPr>
-              <a:spcAft>
-                <a:spcPts val="630"/>
-              </a:spcAft>
-            </a:pPr>
-            <a:r>
-              <a:rPr sz="1400" b="1">
-                <a:solidFill>
-                  <a:srgbClr val="F4B183"/>
-                </a:solidFill>
-                <a:latin typeface="Nunito Sans"/>
-              </a:rPr>
               <a:t>AHORA, LA HOJA DEL DÍA</a:t>
             </a:r>
           </a:p>
@@ -6097,7 +5981,7 @@
                 </a:solidFill>
                 <a:latin typeface="Nunito Sans"/>
               </a:rPr>
-              <a:t>Un hecho dice cómo son las ______; un gusto habla de mí.  (sesión 6)</a:t>
+              <a:t>La autoridad por poder me pide que ______.  (sesión 6)</a:t>
             </a:r>
           </a:p>
           <a:p>
@@ -6122,7 +6006,7 @@
                 </a:solidFill>
                 <a:latin typeface="Nunito Sans"/>
               </a:rPr>
-              <a:t>Costumbre, grupo, autoridad y ______ pueden acertar o fallar: hay que revisarlas.  (sesión 6)</a:t>
+              <a:t>Por su saber, un experto no puede ______: solo darte razones.  (sesión 6)</a:t>
             </a:r>
           </a:p>
           <a:p>
@@ -6147,7 +6031,7 @@
                 </a:solidFill>
                 <a:latin typeface="Nunito Sans"/>
               </a:rPr>
-              <a:t>Una afirmación de hecho puede ser verdadera o ______.  (sesión 2)</a:t>
+              <a:t>Una afirmación de hecho dice cómo son las ______.  (sesión 2)</a:t>
             </a:r>
           </a:p>
         </p:txBody>
@@ -6299,7 +6183,7 @@
                 </a:solidFill>
                 <a:latin typeface="Nunito Sans"/>
               </a:rPr>
-              <a:t>Un hecho dice cómo son las </a:t>
+              <a:t>La autoridad por poder me pide que </a:t>
             </a:r>
             <a:r>
               <a:rPr sz="2600" b="1">
@@ -6308,7 +6192,7 @@
                 </a:solidFill>
                 <a:latin typeface="Nunito Sans"/>
               </a:rPr>
-              <a:t>cosas</a:t>
+              <a:t>obedezca</a:t>
             </a:r>
             <a:r>
               <a:rPr sz="2600" b="0">
@@ -6317,7 +6201,7 @@
                 </a:solidFill>
                 <a:latin typeface="Nunito Sans"/>
               </a:rPr>
-              <a:t>; un gusto habla de mí.  (sesión 6)</a:t>
+              <a:t>.  (sesión 6)</a:t>
             </a:r>
           </a:p>
           <a:p>
@@ -6342,7 +6226,7 @@
                 </a:solidFill>
                 <a:latin typeface="Nunito Sans"/>
               </a:rPr>
-              <a:t>Costumbre, grupo, autoridad y </a:t>
+              <a:t>Por su saber, un experto no puede </a:t>
             </a:r>
             <a:r>
               <a:rPr sz="2600" b="1">
@@ -6351,7 +6235,7 @@
                 </a:solidFill>
                 <a:latin typeface="Nunito Sans"/>
               </a:rPr>
-              <a:t>emoción</a:t>
+              <a:t>mandarte</a:t>
             </a:r>
             <a:r>
               <a:rPr sz="2600" b="0">
@@ -6360,7 +6244,7 @@
                 </a:solidFill>
                 <a:latin typeface="Nunito Sans"/>
               </a:rPr>
-              <a:t> pueden acertar o fallar: hay que revisarlas.  (sesión 6)</a:t>
+              <a:t>: solo darte razones.  (sesión 6)</a:t>
             </a:r>
           </a:p>
           <a:p>
@@ -6385,7 +6269,7 @@
                 </a:solidFill>
                 <a:latin typeface="Nunito Sans"/>
               </a:rPr>
-              <a:t>Una afirmación de hecho puede ser verdadera o </a:t>
+              <a:t>Una afirmación de hecho dice cómo son las </a:t>
             </a:r>
             <a:r>
               <a:rPr sz="2600" b="1">
@@ -6394,7 +6278,7 @@
                 </a:solidFill>
                 <a:latin typeface="Nunito Sans"/>
               </a:rPr>
-              <a:t>falsa</a:t>
+              <a:t>cosas</a:t>
             </a:r>
             <a:r>
               <a:rPr sz="2600" b="0">
@@ -6550,7 +6434,7 @@
                 </a:solidFill>
                 <a:latin typeface="Nunito Sans"/>
               </a:rPr>
-              <a:t>«No compres esas zapatillas: cuestan 120 euros y tienes otras casi nuevas.»</a:t>
+              <a:t>Una dentista con muchos seguidores dice en Instagram que un dentífrico es «el mejor del mundo». Debajo pone: «colaboración pagada».</a:t>
             </a:r>
           </a:p>
         </p:txBody>
@@ -6589,7 +6473,7 @@
                 </a:solidFill>
                 <a:latin typeface="Nunito Sans"/>
               </a:rPr>
-              <a:t>¿Qué te pide que hagas? ¿Qué te da para convencerte?</a:t>
+              <a:t>¿Te fías igual que si te lo dijera tu dentista en la consulta?</a:t>
             </a:r>
           </a:p>
         </p:txBody>
@@ -6693,7 +6577,7 @@
                 </a:solidFill>
                 <a:latin typeface="Fredoka"/>
               </a:rPr>
-              <a:t>Las partes de un argumento</a:t>
+              <a:t>Cuatro preguntas para un experto</a:t>
             </a:r>
           </a:p>
         </p:txBody>
@@ -6758,7 +6642,7 @@
                 </a:solidFill>
                 <a:latin typeface="Nunito Sans"/>
               </a:rPr>
-              <a:t>BLOQUE 1 · LAS PARTES DE UN ARGUMENTO</a:t>
+              <a:t>BLOQUE 1 · CUATRO PREGUNTAS PARA UN EXPERTO</a:t>
             </a:r>
           </a:p>
         </p:txBody>
@@ -6797,7 +6681,7 @@
                 </a:solidFill>
                 <a:latin typeface="Fredoka"/>
               </a:rPr>
-              <a:t>Argumento</a:t>
+              <a:t>Experto</a:t>
             </a:r>
           </a:p>
         </p:txBody>
@@ -6879,43 +6763,7 @@
                 </a:solidFill>
                 <a:latin typeface="Nunito Sans"/>
               </a:rPr>
-              <a:t>Un argumento es una </a:t>
-            </a:r>
-            <a:r>
-              <a:rPr sz="2800" b="1">
-                <a:solidFill>
-                  <a:srgbClr val="1F2A44"/>
-                </a:solidFill>
-                <a:latin typeface="Nunito Sans"/>
-              </a:rPr>
-              <a:t>conclusión</a:t>
-            </a:r>
-            <a:r>
-              <a:rPr sz="2800" b="1">
-                <a:solidFill>
-                  <a:srgbClr val="1F2A44"/>
-                </a:solidFill>
-                <a:latin typeface="Nunito Sans"/>
-              </a:rPr>
-              <a:t> apoyada en una o más </a:t>
-            </a:r>
-            <a:r>
-              <a:rPr sz="2800" b="1">
-                <a:solidFill>
-                  <a:srgbClr val="1F2A44"/>
-                </a:solidFill>
-                <a:latin typeface="Nunito Sans"/>
-              </a:rPr>
-              <a:t>premisas</a:t>
-            </a:r>
-            <a:r>
-              <a:rPr sz="2800" b="1">
-                <a:solidFill>
-                  <a:srgbClr val="1F2A44"/>
-                </a:solidFill>
-                <a:latin typeface="Nunito Sans"/>
-              </a:rPr>
-              <a:t>.</a:t>
+              <a:t>Un experto es una persona que sabe mucho de un tema porque lo ha estudiado o trabajado durante años.</a:t>
             </a:r>
           </a:p>
         </p:txBody>
@@ -6957,13 +6805,22 @@
               <a:t>• </a:t>
             </a:r>
             <a:r>
+              <a:rPr sz="2800" b="0">
+                <a:solidFill>
+                  <a:srgbClr val="1F2A44"/>
+                </a:solidFill>
+                <a:latin typeface="Nunito Sans"/>
+              </a:rPr>
+              <a:t>Sabe de </a:t>
+            </a:r>
+            <a:r>
               <a:rPr sz="2800" b="1">
                 <a:solidFill>
                   <a:srgbClr val="1F2A44"/>
                 </a:solidFill>
                 <a:latin typeface="Nunito Sans"/>
               </a:rPr>
-              <a:t>Conclusión:</a:t>
+              <a:t>su</a:t>
             </a:r>
             <a:r>
               <a:rPr sz="2800" b="0">
@@ -6972,7 +6829,7 @@
                 </a:solidFill>
                 <a:latin typeface="Nunito Sans"/>
               </a:rPr>
-              <a:t> lo que quiero que aceptes</a:t>
+              <a:t> tema, no de todos</a:t>
             </a:r>
           </a:p>
           <a:p>
@@ -6991,22 +6848,13 @@
               <a:t>• </a:t>
             </a:r>
             <a:r>
-              <a:rPr sz="2800" b="1">
+              <a:rPr sz="2800" b="0">
                 <a:solidFill>
                   <a:srgbClr val="1F2A44"/>
                 </a:solidFill>
                 <a:latin typeface="Nunito Sans"/>
               </a:rPr>
-              <a:t>Premisas:</a:t>
-            </a:r>
-            <a:r>
-              <a:rPr sz="2800" b="0">
-                <a:solidFill>
-                  <a:srgbClr val="1F2A44"/>
-                </a:solidFill>
-                <a:latin typeface="Nunito Sans"/>
-              </a:rPr>
-              <a:t> las razones que doy para que lo aceptes</a:t>
+              <a:t>Puede equivocarse, como todos</a:t>
             </a:r>
           </a:p>
           <a:p>
@@ -7031,7 +6879,7 @@
                 </a:solidFill>
                 <a:latin typeface="Nunito Sans"/>
               </a:rPr>
-              <a:t>Premisa = razón, con un nombre más técnico</a:t>
+              <a:t>Nos ahorra tener que comprobarlo todo nosotros</a:t>
             </a:r>
           </a:p>
         </p:txBody>
@@ -7096,7 +6944,7 @@
                 </a:solidFill>
                 <a:latin typeface="Nunito Sans"/>
               </a:rPr>
-              <a:t>BLOQUE 1 · LAS PARTES DE UN ARGUMENTO</a:t>
+              <a:t>BLOQUE 1 · CUATRO PREGUNTAS PARA UN EXPERTO</a:t>
             </a:r>
           </a:p>
         </p:txBody>
@@ -7135,191 +6983,267 @@
                 </a:solidFill>
                 <a:latin typeface="Fredoka"/>
               </a:rPr>
-              <a:t>Indicadores</a:t>
-            </a:r>
-          </a:p>
-        </p:txBody>
-      </p:sp>
-      <p:sp>
-        <p:nvSpPr>
-          <p:cNvPr id="4" name="TextBox 3"/>
-          <p:cNvSpPr txBox="1"/>
+              <a:t>Las cuatro preguntas</a:t>
+            </a:r>
+          </a:p>
+        </p:txBody>
+      </p:sp>
+      <p:graphicFrame>
+        <p:nvGraphicFramePr>
+          <p:cNvPr id="4" name="Table 3"/>
+          <p:cNvGraphicFramePr>
+            <a:graphicFrameLocks noGrp="1"/>
+          </p:cNvGraphicFramePr>
           <p:nvPr/>
-        </p:nvSpPr>
-        <p:spPr>
-          <a:xfrm>
-            <a:off x="840000" y="1730000"/>
-            <a:ext cx="10512000" cy="1000000"/>
-          </a:xfrm>
-          <a:prstGeom prst="rect">
-            <a:avLst/>
-          </a:prstGeom>
-          <a:noFill/>
-        </p:spPr>
-        <p:txBody>
-          <a:bodyPr wrap="square" anchor="ctr">
-            <a:spAutoFit/>
-          </a:bodyPr>
-          <a:lstStyle/>
-          <a:p>
-            <a:pPr>
-              <a:spcAft>
-                <a:spcPts val="1080"/>
-              </a:spcAft>
-            </a:pPr>
-            <a:r>
-              <a:rPr sz="2400" b="0">
-                <a:solidFill>
-                  <a:srgbClr val="1F2A44"/>
-                </a:solidFill>
-                <a:latin typeface="Nunito Sans"/>
-              </a:rPr>
-              <a:t>Los </a:t>
-            </a:r>
-            <a:r>
-              <a:rPr sz="2400" b="1">
-                <a:solidFill>
-                  <a:srgbClr val="1F2A44"/>
-                </a:solidFill>
-                <a:latin typeface="Nunito Sans"/>
-              </a:rPr>
-              <a:t>indicadores</a:t>
-            </a:r>
-            <a:r>
-              <a:rPr sz="2400" b="0">
-                <a:solidFill>
-                  <a:srgbClr val="1F2A44"/>
-                </a:solidFill>
-                <a:latin typeface="Nunito Sans"/>
-              </a:rPr>
-              <a:t> son palabras pista: nos dicen qué es cada parte.</a:t>
-            </a:r>
-          </a:p>
-        </p:txBody>
-      </p:sp>
-      <p:sp>
-        <p:nvSpPr>
-          <p:cNvPr id="5" name="TextBox 4"/>
-          <p:cNvSpPr txBox="1"/>
-          <p:nvPr/>
-        </p:nvSpPr>
-        <p:spPr>
-          <a:xfrm>
-            <a:off x="640000" y="3000000"/>
-            <a:ext cx="10912000" cy="3458000"/>
-          </a:xfrm>
-          <a:prstGeom prst="rect">
-            <a:avLst/>
-          </a:prstGeom>
-          <a:noFill/>
-        </p:spPr>
-        <p:txBody>
-          <a:bodyPr wrap="square">
-            <a:spAutoFit/>
-          </a:bodyPr>
-          <a:lstStyle/>
-          <a:p>
-            <a:pPr>
-              <a:spcAft>
-                <a:spcPts val="1260"/>
-              </a:spcAft>
-            </a:pPr>
-            <a:r>
-              <a:rPr sz="2800" b="1">
-                <a:solidFill>
-                  <a:srgbClr val="E8793A"/>
-                </a:solidFill>
-                <a:latin typeface="Nunito Sans"/>
-              </a:rPr>
-              <a:t>• </a:t>
-            </a:r>
-            <a:r>
-              <a:rPr sz="2800" b="0">
-                <a:solidFill>
-                  <a:srgbClr val="1F2A44"/>
-                </a:solidFill>
-                <a:latin typeface="Nunito Sans"/>
-              </a:rPr>
-              <a:t>Antes de una premisa: «porque», «ya que», «puesto que», «como»</a:t>
-            </a:r>
-          </a:p>
-          <a:p>
-            <a:pPr>
-              <a:spcAft>
-                <a:spcPts val="1260"/>
-              </a:spcAft>
-            </a:pPr>
-            <a:r>
-              <a:rPr sz="2800" b="1">
-                <a:solidFill>
-                  <a:srgbClr val="E8793A"/>
-                </a:solidFill>
-                <a:latin typeface="Nunito Sans"/>
-              </a:rPr>
-              <a:t>• </a:t>
-            </a:r>
-            <a:r>
-              <a:rPr sz="2800" b="0">
-                <a:solidFill>
-                  <a:srgbClr val="1F2A44"/>
-                </a:solidFill>
-                <a:latin typeface="Nunito Sans"/>
-              </a:rPr>
-              <a:t>Antes de una conclusión: «por tanto», «así que», «por eso», «luego»</a:t>
-            </a:r>
-          </a:p>
-          <a:p>
-            <a:pPr>
-              <a:spcAft>
-                <a:spcPts val="1260"/>
-              </a:spcAft>
-            </a:pPr>
-            <a:r>
-              <a:rPr sz="2800" b="1">
-                <a:solidFill>
-                  <a:srgbClr val="E8793A"/>
-                </a:solidFill>
-                <a:latin typeface="Nunito Sans"/>
-              </a:rPr>
-              <a:t>• </a:t>
-            </a:r>
-            <a:r>
-              <a:rPr sz="2800" b="0">
-                <a:solidFill>
-                  <a:srgbClr val="1F2A44"/>
-                </a:solidFill>
-                <a:latin typeface="Nunito Sans"/>
-              </a:rPr>
-              <a:t>A veces no hay indicador: hay que pensar qué apoya a qué</a:t>
-            </a:r>
-          </a:p>
-          <a:p>
-            <a:pPr>
-              <a:spcAft>
-                <a:spcPts val="1260"/>
-              </a:spcAft>
-            </a:pPr>
-            <a:r>
-              <a:rPr sz="2800" b="1">
-                <a:solidFill>
-                  <a:srgbClr val="E8793A"/>
-                </a:solidFill>
-                <a:latin typeface="Nunito Sans"/>
-              </a:rPr>
-              <a:t>• </a:t>
-            </a:r>
-            <a:r>
-              <a:rPr sz="2800" b="0">
-                <a:solidFill>
-                  <a:srgbClr val="1F2A44"/>
-                </a:solidFill>
-                <a:latin typeface="Nunito Sans"/>
-              </a:rPr>
-              <a:t>Ojo: «porque» a veces explica una causa, no da una razón</a:t>
-            </a:r>
-          </a:p>
-        </p:txBody>
-      </p:sp>
+        </p:nvGraphicFramePr>
+        <p:xfrm>
+          <a:off x="640000" y="1700000"/>
+          <a:ext cx="10912000" cy="3000000"/>
+        </p:xfrm>
+        <a:graphic>
+          <a:graphicData uri="http://schemas.openxmlformats.org/drawingml/2006/table">
+            <a:tbl>
+              <a:tblPr firstRow="1" bandRow="1">
+                <a:tableStyleId>{5C22544A-7EE6-4342-B048-85BDC9FD1C3A}</a:tableStyleId>
+              </a:tblPr>
+              <a:tblGrid>
+                <a:gridCol w="5456000"/>
+                <a:gridCol w="5456000"/>
+              </a:tblGrid>
+              <a:tr h="600000">
+                <a:tc>
+                  <a:txBody>
+                    <a:bodyPr/>
+                    <a:lstStyle/>
+                    <a:p>
+                      <a:r>
+                        <a:rPr sz="2000" b="1">
+                          <a:solidFill>
+                            <a:srgbClr val="FBF7EF"/>
+                          </a:solidFill>
+                          <a:latin typeface="Fredoka"/>
+                        </a:rPr>
+                        <a:t>Mira…</a:t>
+                      </a:r>
+                    </a:p>
+                  </a:txBody>
+                  <a:tcPr>
+                    <a:solidFill>
+                      <a:srgbClr val="1F2A44"/>
+                    </a:solidFill>
+                  </a:tcPr>
+                </a:tc>
+                <a:tc>
+                  <a:txBody>
+                    <a:bodyPr/>
+                    <a:lstStyle/>
+                    <a:p>
+                      <a:r>
+                        <a:rPr sz="2000" b="1">
+                          <a:solidFill>
+                            <a:srgbClr val="FBF7EF"/>
+                          </a:solidFill>
+                          <a:latin typeface="Fredoka"/>
+                        </a:rPr>
+                        <a:t>Pregunta</a:t>
+                      </a:r>
+                    </a:p>
+                  </a:txBody>
+                  <a:tcPr>
+                    <a:solidFill>
+                      <a:srgbClr val="1F2A44"/>
+                    </a:solidFill>
+                  </a:tcPr>
+                </a:tc>
+              </a:tr>
+              <a:tr h="600000">
+                <a:tc>
+                  <a:txBody>
+                    <a:bodyPr/>
+                    <a:lstStyle/>
+                    <a:p>
+                      <a:r>
+                        <a:rPr sz="2000" b="1">
+                          <a:solidFill>
+                            <a:srgbClr val="1F2A44"/>
+                          </a:solidFill>
+                          <a:latin typeface="Nunito Sans"/>
+                        </a:rPr>
+                        <a:t>Su campo</a:t>
+                      </a:r>
+                    </a:p>
+                  </a:txBody>
+                  <a:tcPr>
+                    <a:solidFill>
+                      <a:srgbClr val="FFFFFF"/>
+                    </a:solidFill>
+                  </a:tcPr>
+                </a:tc>
+                <a:tc>
+                  <a:txBody>
+                    <a:bodyPr/>
+                    <a:lstStyle/>
+                    <a:p>
+                      <a:r>
+                        <a:rPr sz="2000" b="0">
+                          <a:solidFill>
+                            <a:srgbClr val="1F2A44"/>
+                          </a:solidFill>
+                          <a:latin typeface="Nunito Sans"/>
+                        </a:rPr>
+                        <a:t>¿Habla de lo que ha estudiado?</a:t>
+                      </a:r>
+                    </a:p>
+                  </a:txBody>
+                  <a:tcPr>
+                    <a:solidFill>
+                      <a:srgbClr val="FFFFFF"/>
+                    </a:solidFill>
+                  </a:tcPr>
+                </a:tc>
+              </a:tr>
+              <a:tr h="600000">
+                <a:tc>
+                  <a:txBody>
+                    <a:bodyPr/>
+                    <a:lstStyle/>
+                    <a:p>
+                      <a:r>
+                        <a:rPr sz="2000" b="1">
+                          <a:solidFill>
+                            <a:srgbClr val="1F2A44"/>
+                          </a:solidFill>
+                          <a:latin typeface="Nunito Sans"/>
+                        </a:rPr>
+                        <a:t>El consenso</a:t>
+                      </a:r>
+                    </a:p>
+                  </a:txBody>
+                  <a:tcPr>
+                    <a:solidFill>
+                      <a:srgbClr val="EAF0F7"/>
+                    </a:solidFill>
+                  </a:tcPr>
+                </a:tc>
+                <a:tc>
+                  <a:txBody>
+                    <a:bodyPr/>
+                    <a:lstStyle/>
+                    <a:p>
+                      <a:r>
+                        <a:rPr sz="2000" b="0">
+                          <a:solidFill>
+                            <a:srgbClr val="1F2A44"/>
+                          </a:solidFill>
+                          <a:latin typeface="Nunito Sans"/>
+                        </a:rPr>
+                        <a:t>¿Qué dicen la mayoría de los expertos del tema?</a:t>
+                      </a:r>
+                    </a:p>
+                  </a:txBody>
+                  <a:tcPr>
+                    <a:solidFill>
+                      <a:srgbClr val="EAF0F7"/>
+                    </a:solidFill>
+                  </a:tcPr>
+                </a:tc>
+              </a:tr>
+              <a:tr h="600000">
+                <a:tc>
+                  <a:txBody>
+                    <a:bodyPr/>
+                    <a:lstStyle/>
+                    <a:p>
+                      <a:r>
+                        <a:rPr sz="2000" b="1">
+                          <a:solidFill>
+                            <a:srgbClr val="1F2A44"/>
+                          </a:solidFill>
+                          <a:latin typeface="Nunito Sans"/>
+                        </a:rPr>
+                        <a:t>Sus intereses</a:t>
+                      </a:r>
+                    </a:p>
+                  </a:txBody>
+                  <a:tcPr>
+                    <a:solidFill>
+                      <a:srgbClr val="FFFFFF"/>
+                    </a:solidFill>
+                  </a:tcPr>
+                </a:tc>
+                <a:tc>
+                  <a:txBody>
+                    <a:bodyPr/>
+                    <a:lstStyle/>
+                    <a:p>
+                      <a:r>
+                        <a:rPr sz="2000" b="0">
+                          <a:solidFill>
+                            <a:srgbClr val="1F2A44"/>
+                          </a:solidFill>
+                          <a:latin typeface="Nunito Sans"/>
+                        </a:rPr>
+                        <a:t>¿Gana algo si le creo?</a:t>
+                      </a:r>
+                    </a:p>
+                  </a:txBody>
+                  <a:tcPr>
+                    <a:solidFill>
+                      <a:srgbClr val="FFFFFF"/>
+                    </a:solidFill>
+                  </a:tcPr>
+                </a:tc>
+              </a:tr>
+              <a:tr h="600000">
+                <a:tc>
+                  <a:txBody>
+                    <a:bodyPr/>
+                    <a:lstStyle/>
+                    <a:p>
+                      <a:r>
+                        <a:rPr sz="2000" b="1">
+                          <a:solidFill>
+                            <a:srgbClr val="1F2A44"/>
+                          </a:solidFill>
+                          <a:latin typeface="Nunito Sans"/>
+                        </a:rPr>
+                        <a:t>Sus pruebas</a:t>
+                      </a:r>
+                    </a:p>
+                  </a:txBody>
+                  <a:tcPr>
+                    <a:solidFill>
+                      <a:srgbClr val="EAF0F7"/>
+                    </a:solidFill>
+                  </a:tcPr>
+                </a:tc>
+                <a:tc>
+                  <a:txBody>
+                    <a:bodyPr/>
+                    <a:lstStyle/>
+                    <a:p>
+                      <a:r>
+                        <a:rPr sz="2000" b="0">
+                          <a:solidFill>
+                            <a:srgbClr val="1F2A44"/>
+                          </a:solidFill>
+                          <a:latin typeface="Nunito Sans"/>
+                        </a:rPr>
+                        <a:t>¿Explica cómo lo sabe?</a:t>
+                      </a:r>
+                    </a:p>
+                  </a:txBody>
+                  <a:tcPr>
+                    <a:solidFill>
+                      <a:srgbClr val="EAF0F7"/>
+                    </a:solidFill>
+                  </a:tcPr>
+                </a:tc>
+              </a:tr>
+            </a:tbl>
+          </a:graphicData>
+        </a:graphic>
+      </p:graphicFrame>
     </p:spTree>
   </p:cSld>
   <p:clrMapOvr>
@@ -7380,7 +7304,7 @@
                 </a:solidFill>
                 <a:latin typeface="Nunito Sans"/>
               </a:rPr>
-              <a:t>BLOQUE 1 · LAS PARTES DE UN ARGUMENTO</a:t>
+              <a:t>BLOQUE 1 · CUATRO PREGUNTAS PARA UN EXPERTO</a:t>
             </a:r>
           </a:p>
         </p:txBody>
@@ -7419,310 +7343,191 @@
                 </a:solidFill>
                 <a:latin typeface="Fredoka"/>
               </a:rPr>
-              <a:t>Tres argumentos, separados</a:t>
-            </a:r>
-          </a:p>
-        </p:txBody>
-      </p:sp>
-      <p:graphicFrame>
-        <p:nvGraphicFramePr>
-          <p:cNvPr id="4" name="Table 3"/>
-          <p:cNvGraphicFramePr>
-            <a:graphicFrameLocks noGrp="1"/>
-          </p:cNvGraphicFramePr>
+              <a:t>Consenso</a:t>
+            </a:r>
+          </a:p>
+        </p:txBody>
+      </p:sp>
+      <p:sp>
+        <p:nvSpPr>
+          <p:cNvPr id="4" name="Rectangle 3"/>
+          <p:cNvSpPr/>
           <p:nvPr/>
-        </p:nvGraphicFramePr>
-        <p:xfrm>
-          <a:off x="640000" y="1700000"/>
-          <a:ext cx="10912000" cy="2400000"/>
-        </p:xfrm>
-        <a:graphic>
-          <a:graphicData uri="http://schemas.openxmlformats.org/drawingml/2006/table">
-            <a:tbl>
-              <a:tblPr firstRow="1" bandRow="1">
-                <a:tableStyleId>{5C22544A-7EE6-4342-B048-85BDC9FD1C3A}</a:tableStyleId>
-              </a:tblPr>
-              <a:tblGrid>
-                <a:gridCol w="3637333"/>
-                <a:gridCol w="3637333"/>
-                <a:gridCol w="3637334"/>
-              </a:tblGrid>
-              <a:tr h="600000">
-                <a:tc>
-                  <a:txBody>
-                    <a:bodyPr/>
-                    <a:lstStyle/>
-                    <a:p>
-                      <a:r>
-                        <a:rPr sz="2000" b="1">
-                          <a:solidFill>
-                            <a:srgbClr val="FBF7EF"/>
-                          </a:solidFill>
-                          <a:latin typeface="Fredoka"/>
-                        </a:rPr>
-                        <a:t>Argumento</a:t>
-                      </a:r>
-                    </a:p>
-                  </a:txBody>
-                  <a:tcPr>
-                    <a:solidFill>
-                      <a:srgbClr val="1F2A44"/>
-                    </a:solidFill>
-                  </a:tcPr>
-                </a:tc>
-                <a:tc>
-                  <a:txBody>
-                    <a:bodyPr/>
-                    <a:lstStyle/>
-                    <a:p>
-                      <a:r>
-                        <a:rPr sz="2000" b="1">
-                          <a:solidFill>
-                            <a:srgbClr val="FBF7EF"/>
-                          </a:solidFill>
-                          <a:latin typeface="Fredoka"/>
-                        </a:rPr>
-                        <a:t>Premisa</a:t>
-                      </a:r>
-                    </a:p>
-                  </a:txBody>
-                  <a:tcPr>
-                    <a:solidFill>
-                      <a:srgbClr val="1F2A44"/>
-                    </a:solidFill>
-                  </a:tcPr>
-                </a:tc>
-                <a:tc>
-                  <a:txBody>
-                    <a:bodyPr/>
-                    <a:lstStyle/>
-                    <a:p>
-                      <a:r>
-                        <a:rPr sz="2000" b="1">
-                          <a:solidFill>
-                            <a:srgbClr val="FBF7EF"/>
-                          </a:solidFill>
-                          <a:latin typeface="Fredoka"/>
-                        </a:rPr>
-                        <a:t>Conclusión</a:t>
-                      </a:r>
-                    </a:p>
-                  </a:txBody>
-                  <a:tcPr>
-                    <a:solidFill>
-                      <a:srgbClr val="1F2A44"/>
-                    </a:solidFill>
-                  </a:tcPr>
-                </a:tc>
-              </a:tr>
-              <a:tr h="600000">
-                <a:tc>
-                  <a:txBody>
-                    <a:bodyPr/>
-                    <a:lstStyle/>
-                    <a:p>
-                      <a:r>
-                        <a:rPr sz="2000" b="0">
-                          <a:solidFill>
-                            <a:srgbClr val="1F2A44"/>
-                          </a:solidFill>
-                          <a:latin typeface="Nunito Sans"/>
-                        </a:rPr>
-                        <a:t>«Deberíamos ir en metro, porque hoy hay huelga de autobuses.»</a:t>
-                      </a:r>
-                    </a:p>
-                  </a:txBody>
-                  <a:tcPr>
-                    <a:solidFill>
-                      <a:srgbClr val="FFFFFF"/>
-                    </a:solidFill>
-                  </a:tcPr>
-                </a:tc>
-                <a:tc>
-                  <a:txBody>
-                    <a:bodyPr/>
-                    <a:lstStyle/>
-                    <a:p>
-                      <a:r>
-                        <a:rPr sz="2000" b="0">
-                          <a:solidFill>
-                            <a:srgbClr val="1F2A44"/>
-                          </a:solidFill>
-                          <a:latin typeface="Nunito Sans"/>
-                        </a:rPr>
-                        <a:t>Hoy hay huelga de autobuses.</a:t>
-                      </a:r>
-                    </a:p>
-                  </a:txBody>
-                  <a:tcPr>
-                    <a:solidFill>
-                      <a:srgbClr val="FFFFFF"/>
-                    </a:solidFill>
-                  </a:tcPr>
-                </a:tc>
-                <a:tc>
-                  <a:txBody>
-                    <a:bodyPr/>
-                    <a:lstStyle/>
-                    <a:p>
-                      <a:r>
-                        <a:rPr sz="2000" b="0">
-                          <a:solidFill>
-                            <a:srgbClr val="1F2A44"/>
-                          </a:solidFill>
-                          <a:latin typeface="Nunito Sans"/>
-                        </a:rPr>
-                        <a:t>Deberíamos ir en metro.</a:t>
-                      </a:r>
-                    </a:p>
-                  </a:txBody>
-                  <a:tcPr>
-                    <a:solidFill>
-                      <a:srgbClr val="FFFFFF"/>
-                    </a:solidFill>
-                  </a:tcPr>
-                </a:tc>
-              </a:tr>
-              <a:tr h="600000">
-                <a:tc>
-                  <a:txBody>
-                    <a:bodyPr/>
-                    <a:lstStyle/>
-                    <a:p>
-                      <a:r>
-                        <a:rPr sz="2000" b="0">
-                          <a:solidFill>
-                            <a:srgbClr val="1F2A44"/>
-                          </a:solidFill>
-                          <a:latin typeface="Nunito Sans"/>
-                        </a:rPr>
-                        <a:t>«Una chica paró tres penaltis, así que debería jugar de portera.»</a:t>
-                      </a:r>
-                    </a:p>
-                  </a:txBody>
-                  <a:tcPr>
-                    <a:solidFill>
-                      <a:srgbClr val="EAF0F7"/>
-                    </a:solidFill>
-                  </a:tcPr>
-                </a:tc>
-                <a:tc>
-                  <a:txBody>
-                    <a:bodyPr/>
-                    <a:lstStyle/>
-                    <a:p>
-                      <a:r>
-                        <a:rPr sz="2000" b="0">
-                          <a:solidFill>
-                            <a:srgbClr val="1F2A44"/>
-                          </a:solidFill>
-                          <a:latin typeface="Nunito Sans"/>
-                        </a:rPr>
-                        <a:t>Paró tres penaltis.</a:t>
-                      </a:r>
-                    </a:p>
-                  </a:txBody>
-                  <a:tcPr>
-                    <a:solidFill>
-                      <a:srgbClr val="EAF0F7"/>
-                    </a:solidFill>
-                  </a:tcPr>
-                </a:tc>
-                <a:tc>
-                  <a:txBody>
-                    <a:bodyPr/>
-                    <a:lstStyle/>
-                    <a:p>
-                      <a:r>
-                        <a:rPr sz="2000" b="0">
-                          <a:solidFill>
-                            <a:srgbClr val="1F2A44"/>
-                          </a:solidFill>
-                          <a:latin typeface="Nunito Sans"/>
-                        </a:rPr>
-                        <a:t>Debería jugar de portera.</a:t>
-                      </a:r>
-                    </a:p>
-                  </a:txBody>
-                  <a:tcPr>
-                    <a:solidFill>
-                      <a:srgbClr val="EAF0F7"/>
-                    </a:solidFill>
-                  </a:tcPr>
-                </a:tc>
-              </a:tr>
-              <a:tr h="600000">
-                <a:tc>
-                  <a:txBody>
-                    <a:bodyPr/>
-                    <a:lstStyle/>
-                    <a:p>
-                      <a:r>
-                        <a:rPr sz="2000" b="0">
-                          <a:solidFill>
-                            <a:srgbClr val="1F2A44"/>
-                          </a:solidFill>
-                          <a:latin typeface="Nunito Sans"/>
-                        </a:rPr>
-                        <a:t>«No compres esas zapatillas: cuestan 120 euros y tienes otras.»</a:t>
-                      </a:r>
-                    </a:p>
-                  </a:txBody>
-                  <a:tcPr>
-                    <a:solidFill>
-                      <a:srgbClr val="FFFFFF"/>
-                    </a:solidFill>
-                  </a:tcPr>
-                </a:tc>
-                <a:tc>
-                  <a:txBody>
-                    <a:bodyPr/>
-                    <a:lstStyle/>
-                    <a:p>
-                      <a:r>
-                        <a:rPr sz="2000" b="0">
-                          <a:solidFill>
-                            <a:srgbClr val="1F2A44"/>
-                          </a:solidFill>
-                          <a:latin typeface="Nunito Sans"/>
-                        </a:rPr>
-                        <a:t>Cuestan 120 euros. Tienes otras.</a:t>
-                      </a:r>
-                    </a:p>
-                  </a:txBody>
-                  <a:tcPr>
-                    <a:solidFill>
-                      <a:srgbClr val="FFFFFF"/>
-                    </a:solidFill>
-                  </a:tcPr>
-                </a:tc>
-                <a:tc>
-                  <a:txBody>
-                    <a:bodyPr/>
-                    <a:lstStyle/>
-                    <a:p>
-                      <a:r>
-                        <a:rPr sz="2000" b="0">
-                          <a:solidFill>
-                            <a:srgbClr val="1F2A44"/>
-                          </a:solidFill>
-                          <a:latin typeface="Nunito Sans"/>
-                        </a:rPr>
-                        <a:t>No compres esas zapatillas.</a:t>
-                      </a:r>
-                    </a:p>
-                  </a:txBody>
-                  <a:tcPr>
-                    <a:solidFill>
-                      <a:srgbClr val="FFFFFF"/>
-                    </a:solidFill>
-                  </a:tcPr>
-                </a:tc>
-              </a:tr>
-            </a:tbl>
-          </a:graphicData>
-        </a:graphic>
-      </p:graphicFrame>
+        </p:nvSpPr>
+        <p:spPr>
+          <a:xfrm>
+            <a:off x="640000" y="1650000"/>
+            <a:ext cx="10912000" cy="1150000"/>
+          </a:xfrm>
+          <a:prstGeom prst="rect">
+            <a:avLst/>
+          </a:prstGeom>
+          <a:solidFill>
+            <a:srgbClr val="EAF0F7"/>
+          </a:solidFill>
+          <a:ln>
+            <a:noFill/>
+          </a:ln>
+        </p:spPr>
+        <p:style>
+          <a:lnRef idx="1">
+            <a:schemeClr val="accent1"/>
+          </a:lnRef>
+          <a:fillRef idx="3">
+            <a:schemeClr val="accent1"/>
+          </a:fillRef>
+          <a:effectRef idx="2">
+            <a:schemeClr val="accent1"/>
+          </a:effectRef>
+          <a:fontRef idx="minor">
+            <a:schemeClr val="lt1"/>
+          </a:fontRef>
+        </p:style>
+        <p:txBody>
+          <a:bodyPr rtlCol="0" anchor="ctr"/>
+          <a:lstStyle/>
+          <a:p>
+            <a:pPr algn="ctr"/>
+          </a:p>
+        </p:txBody>
+      </p:sp>
+      <p:sp>
+        <p:nvSpPr>
+          <p:cNvPr id="5" name="TextBox 4"/>
+          <p:cNvSpPr txBox="1"/>
+          <p:nvPr/>
+        </p:nvSpPr>
+        <p:spPr>
+          <a:xfrm>
+            <a:off x="840000" y="1730000"/>
+            <a:ext cx="10512000" cy="1000000"/>
+          </a:xfrm>
+          <a:prstGeom prst="rect">
+            <a:avLst/>
+          </a:prstGeom>
+          <a:noFill/>
+        </p:spPr>
+        <p:txBody>
+          <a:bodyPr wrap="square" anchor="ctr">
+            <a:spAutoFit/>
+          </a:bodyPr>
+          <a:lstStyle/>
+          <a:p>
+            <a:pPr>
+              <a:spcAft>
+                <a:spcPts val="1260"/>
+              </a:spcAft>
+            </a:pPr>
+            <a:r>
+              <a:rPr sz="2800" b="1">
+                <a:solidFill>
+                  <a:srgbClr val="1F2A44"/>
+                </a:solidFill>
+                <a:latin typeface="Nunito Sans"/>
+              </a:rPr>
+              <a:t>El consenso es cuando casi todos los expertos de un tema están de acuerdo después de mirar las pruebas.</a:t>
+            </a:r>
+          </a:p>
+        </p:txBody>
+      </p:sp>
+      <p:sp>
+        <p:nvSpPr>
+          <p:cNvPr id="6" name="TextBox 5"/>
+          <p:cNvSpPr txBox="1"/>
+          <p:nvPr/>
+        </p:nvSpPr>
+        <p:spPr>
+          <a:xfrm>
+            <a:off x="640000" y="3000000"/>
+            <a:ext cx="10912000" cy="3458000"/>
+          </a:xfrm>
+          <a:prstGeom prst="rect">
+            <a:avLst/>
+          </a:prstGeom>
+          <a:noFill/>
+        </p:spPr>
+        <p:txBody>
+          <a:bodyPr wrap="square">
+            <a:spAutoFit/>
+          </a:bodyPr>
+          <a:lstStyle/>
+          <a:p>
+            <a:pPr>
+              <a:spcAft>
+                <a:spcPts val="1260"/>
+              </a:spcAft>
+            </a:pPr>
+            <a:r>
+              <a:rPr sz="2800" b="1">
+                <a:solidFill>
+                  <a:srgbClr val="E8793A"/>
+                </a:solidFill>
+                <a:latin typeface="Nunito Sans"/>
+              </a:rPr>
+              <a:t>• </a:t>
+            </a:r>
+            <a:r>
+              <a:rPr sz="2800" b="0">
+                <a:solidFill>
+                  <a:srgbClr val="1F2A44"/>
+                </a:solidFill>
+                <a:latin typeface="Nunito Sans"/>
+              </a:rPr>
+              <a:t>Vale más que la opinión de un experto solo</a:t>
+            </a:r>
+          </a:p>
+          <a:p>
+            <a:pPr>
+              <a:spcAft>
+                <a:spcPts val="1260"/>
+              </a:spcAft>
+            </a:pPr>
+            <a:r>
+              <a:rPr sz="2800" b="1">
+                <a:solidFill>
+                  <a:srgbClr val="E8793A"/>
+                </a:solidFill>
+                <a:latin typeface="Nunito Sans"/>
+              </a:rPr>
+              <a:t>• </a:t>
+            </a:r>
+            <a:r>
+              <a:rPr sz="2800" b="0">
+                <a:solidFill>
+                  <a:srgbClr val="1F2A44"/>
+                </a:solidFill>
+                <a:latin typeface="Nunito Sans"/>
+              </a:rPr>
+              <a:t>Uno puede equivocarse; casi todos a la vez, es más raro</a:t>
+            </a:r>
+          </a:p>
+          <a:p>
+            <a:pPr>
+              <a:spcAft>
+                <a:spcPts val="1260"/>
+              </a:spcAft>
+            </a:pPr>
+            <a:r>
+              <a:rPr sz="2800" b="1">
+                <a:solidFill>
+                  <a:srgbClr val="E8793A"/>
+                </a:solidFill>
+                <a:latin typeface="Nunito Sans"/>
+              </a:rPr>
+              <a:t>• </a:t>
+            </a:r>
+            <a:r>
+              <a:rPr sz="2800" b="0">
+                <a:solidFill>
+                  <a:srgbClr val="1F2A44"/>
+                </a:solidFill>
+                <a:latin typeface="Nunito Sans"/>
+              </a:rPr>
+              <a:t>Ejemplo: la Tierra gira alrededor del Sol</a:t>
+            </a:r>
+          </a:p>
+        </p:txBody>
+      </p:sp>
     </p:spTree>
   </p:cSld>
   <p:clrMapOvr>
@@ -7737,7 +7542,7 @@
     <p:bg>
       <p:bgPr>
         <a:solidFill>
-          <a:srgbClr val="FBF7EF"/>
+          <a:srgbClr val="1F2A44"/>
         </a:solidFill>
         <a:effectLst/>
       </p:bgPr>
@@ -7757,8 +7562,8 @@
         </p:nvSpPr>
         <p:spPr>
           <a:xfrm>
-            <a:off x="640000" y="380000"/>
-            <a:ext cx="10912000" cy="420000"/>
+            <a:off x="640000" y="2300000"/>
+            <a:ext cx="10912000" cy="500000"/>
           </a:xfrm>
           <a:prstGeom prst="rect">
             <a:avLst/>
@@ -7773,17 +7578,17 @@
           <a:p>
             <a:pPr>
               <a:spcAft>
-                <a:spcPts val="630"/>
+                <a:spcPts val="810"/>
               </a:spcAft>
             </a:pPr>
             <a:r>
-              <a:rPr sz="1400" b="1">
-                <a:solidFill>
-                  <a:srgbClr val="E8793A"/>
-                </a:solidFill>
-                <a:latin typeface="Nunito Sans"/>
-              </a:rPr>
-              <a:t>BLOQUE 1 · LAS PARTES DE UN ARGUMENTO</a:t>
+              <a:rPr sz="1800" b="1">
+                <a:solidFill>
+                  <a:srgbClr val="F4B183"/>
+                </a:solidFill>
+                <a:latin typeface="Nunito Sans"/>
+              </a:rPr>
+              <a:t>BLOQUE 2</a:t>
             </a:r>
           </a:p>
         </p:txBody>
@@ -7796,7 +7601,7 @@
         </p:nvSpPr>
         <p:spPr>
           <a:xfrm>
-            <a:off x="640000" y="760000"/>
+            <a:off x="640000" y="2800000"/>
             <a:ext cx="10912000" cy="800000"/>
           </a:xfrm>
           <a:prstGeom prst="rect">
@@ -7812,402 +7617,17 @@
           <a:p>
             <a:pPr>
               <a:spcAft>
-                <a:spcPts val="1710"/>
+                <a:spcPts val="2160"/>
               </a:spcAft>
             </a:pPr>
             <a:r>
-              <a:rPr sz="3800" b="1">
-                <a:solidFill>
-                  <a:srgbClr val="1F2A44"/>
+              <a:rPr sz="4800" b="1">
+                <a:solidFill>
+                  <a:srgbClr val="FBF7EF"/>
                 </a:solidFill>
                 <a:latin typeface="Fredoka"/>
               </a:rPr>
-              <a:t>¿Es un argumento?</a:t>
-            </a:r>
-          </a:p>
-        </p:txBody>
-      </p:sp>
-      <p:sp>
-        <p:nvSpPr>
-          <p:cNvPr id="4" name="Rectangle 3"/>
-          <p:cNvSpPr/>
-          <p:nvPr/>
-        </p:nvSpPr>
-        <p:spPr>
-          <a:xfrm>
-            <a:off x="640000" y="1650000"/>
-            <a:ext cx="5306000" cy="4400000"/>
-          </a:xfrm>
-          <a:prstGeom prst="rect">
-            <a:avLst/>
-          </a:prstGeom>
-          <a:solidFill>
-            <a:srgbClr val="FBE3D2"/>
-          </a:solidFill>
-          <a:ln>
-            <a:noFill/>
-          </a:ln>
-        </p:spPr>
-        <p:style>
-          <a:lnRef idx="1">
-            <a:schemeClr val="accent1"/>
-          </a:lnRef>
-          <a:fillRef idx="3">
-            <a:schemeClr val="accent1"/>
-          </a:fillRef>
-          <a:effectRef idx="2">
-            <a:schemeClr val="accent1"/>
-          </a:effectRef>
-          <a:fontRef idx="minor">
-            <a:schemeClr val="lt1"/>
-          </a:fontRef>
-        </p:style>
-        <p:txBody>
-          <a:bodyPr rtlCol="0" anchor="ctr"/>
-          <a:lstStyle/>
-          <a:p>
-            <a:pPr algn="ctr"/>
-          </a:p>
-        </p:txBody>
-      </p:sp>
-      <p:sp>
-        <p:nvSpPr>
-          <p:cNvPr id="5" name="TextBox 4"/>
-          <p:cNvSpPr txBox="1"/>
-          <p:nvPr/>
-        </p:nvSpPr>
-        <p:spPr>
-          <a:xfrm>
-            <a:off x="840000" y="1750000"/>
-            <a:ext cx="4906000" cy="600000"/>
-          </a:xfrm>
-          <a:prstGeom prst="rect">
-            <a:avLst/>
-          </a:prstGeom>
-          <a:noFill/>
-        </p:spPr>
-        <p:txBody>
-          <a:bodyPr wrap="square">
-            <a:spAutoFit/>
-          </a:bodyPr>
-          <a:lstStyle/>
-          <a:p>
-            <a:pPr>
-              <a:spcAft>
-                <a:spcPts val="1260"/>
-              </a:spcAft>
-            </a:pPr>
-            <a:r>
-              <a:rPr sz="2800" b="1">
-                <a:solidFill>
-                  <a:srgbClr val="C2531C"/>
-                </a:solidFill>
-                <a:latin typeface="Nunito Sans"/>
-              </a:rPr>
-              <a:t>No es un argumento</a:t>
-            </a:r>
-          </a:p>
-        </p:txBody>
-      </p:sp>
-      <p:sp>
-        <p:nvSpPr>
-          <p:cNvPr id="6" name="TextBox 5"/>
-          <p:cNvSpPr txBox="1"/>
-          <p:nvPr/>
-        </p:nvSpPr>
-        <p:spPr>
-          <a:xfrm>
-            <a:off x="840000" y="2400000"/>
-            <a:ext cx="4906000" cy="3500000"/>
-          </a:xfrm>
-          <a:prstGeom prst="rect">
-            <a:avLst/>
-          </a:prstGeom>
-          <a:noFill/>
-        </p:spPr>
-        <p:txBody>
-          <a:bodyPr wrap="square">
-            <a:spAutoFit/>
-          </a:bodyPr>
-          <a:lstStyle/>
-          <a:p>
-            <a:pPr>
-              <a:spcAft>
-                <a:spcPts val="1170"/>
-              </a:spcAft>
-            </a:pPr>
-            <a:r>
-              <a:rPr sz="2600" b="1">
-                <a:solidFill>
-                  <a:srgbClr val="E8793A"/>
-                </a:solidFill>
-                <a:latin typeface="Nunito Sans"/>
-              </a:rPr>
-              <a:t>• </a:t>
-            </a:r>
-            <a:r>
-              <a:rPr sz="2600" b="0">
-                <a:solidFill>
-                  <a:srgbClr val="1F2A44"/>
-                </a:solidFill>
-                <a:latin typeface="Nunito Sans"/>
-              </a:rPr>
-              <a:t>Una orden sola: «¡Cállate!»</a:t>
-            </a:r>
-          </a:p>
-          <a:p>
-            <a:pPr>
-              <a:spcAft>
-                <a:spcPts val="1170"/>
-              </a:spcAft>
-            </a:pPr>
-            <a:r>
-              <a:rPr sz="2600" b="1">
-                <a:solidFill>
-                  <a:srgbClr val="E8793A"/>
-                </a:solidFill>
-                <a:latin typeface="Nunito Sans"/>
-              </a:rPr>
-              <a:t>• </a:t>
-            </a:r>
-            <a:r>
-              <a:rPr sz="2600" b="0">
-                <a:solidFill>
-                  <a:srgbClr val="1F2A44"/>
-                </a:solidFill>
-                <a:latin typeface="Nunito Sans"/>
-              </a:rPr>
-              <a:t>Una opinión sin razones: «El fútbol es lo mejor»</a:t>
-            </a:r>
-          </a:p>
-          <a:p>
-            <a:pPr>
-              <a:spcAft>
-                <a:spcPts val="1170"/>
-              </a:spcAft>
-            </a:pPr>
-            <a:r>
-              <a:rPr sz="2600" b="1">
-                <a:solidFill>
-                  <a:srgbClr val="E8793A"/>
-                </a:solidFill>
-                <a:latin typeface="Nunito Sans"/>
-              </a:rPr>
-              <a:t>• </a:t>
-            </a:r>
-            <a:r>
-              <a:rPr sz="2600" b="0">
-                <a:solidFill>
-                  <a:srgbClr val="1F2A44"/>
-                </a:solidFill>
-                <a:latin typeface="Nunito Sans"/>
-              </a:rPr>
-              <a:t>Una pregunta: «¿Vienes al cine?»</a:t>
-            </a:r>
-          </a:p>
-          <a:p>
-            <a:pPr>
-              <a:spcAft>
-                <a:spcPts val="1170"/>
-              </a:spcAft>
-            </a:pPr>
-            <a:r>
-              <a:rPr sz="2600" b="1">
-                <a:solidFill>
-                  <a:srgbClr val="E8793A"/>
-                </a:solidFill>
-                <a:latin typeface="Nunito Sans"/>
-              </a:rPr>
-              <a:t>• </a:t>
-            </a:r>
-            <a:r>
-              <a:rPr sz="2600" b="0">
-                <a:solidFill>
-                  <a:srgbClr val="1F2A44"/>
-                </a:solidFill>
-                <a:latin typeface="Nunito Sans"/>
-              </a:rPr>
-              <a:t>Datos sueltos, sin conclusión</a:t>
-            </a:r>
-          </a:p>
-        </p:txBody>
-      </p:sp>
-      <p:sp>
-        <p:nvSpPr>
-          <p:cNvPr id="7" name="Rectangle 6"/>
-          <p:cNvSpPr/>
-          <p:nvPr/>
-        </p:nvSpPr>
-        <p:spPr>
-          <a:xfrm>
-            <a:off x="6246000" y="1650000"/>
-            <a:ext cx="5306000" cy="4400000"/>
-          </a:xfrm>
-          <a:prstGeom prst="rect">
-            <a:avLst/>
-          </a:prstGeom>
-          <a:solidFill>
-            <a:srgbClr val="EAF0F7"/>
-          </a:solidFill>
-          <a:ln>
-            <a:noFill/>
-          </a:ln>
-        </p:spPr>
-        <p:style>
-          <a:lnRef idx="1">
-            <a:schemeClr val="accent1"/>
-          </a:lnRef>
-          <a:fillRef idx="3">
-            <a:schemeClr val="accent1"/>
-          </a:fillRef>
-          <a:effectRef idx="2">
-            <a:schemeClr val="accent1"/>
-          </a:effectRef>
-          <a:fontRef idx="minor">
-            <a:schemeClr val="lt1"/>
-          </a:fontRef>
-        </p:style>
-        <p:txBody>
-          <a:bodyPr rtlCol="0" anchor="ctr"/>
-          <a:lstStyle/>
-          <a:p>
-            <a:pPr algn="ctr"/>
-          </a:p>
-        </p:txBody>
-      </p:sp>
-      <p:sp>
-        <p:nvSpPr>
-          <p:cNvPr id="8" name="TextBox 7"/>
-          <p:cNvSpPr txBox="1"/>
-          <p:nvPr/>
-        </p:nvSpPr>
-        <p:spPr>
-          <a:xfrm>
-            <a:off x="6446000" y="1750000"/>
-            <a:ext cx="4906000" cy="600000"/>
-          </a:xfrm>
-          <a:prstGeom prst="rect">
-            <a:avLst/>
-          </a:prstGeom>
-          <a:noFill/>
-        </p:spPr>
-        <p:txBody>
-          <a:bodyPr wrap="square">
-            <a:spAutoFit/>
-          </a:bodyPr>
-          <a:lstStyle/>
-          <a:p>
-            <a:pPr>
-              <a:spcAft>
-                <a:spcPts val="1260"/>
-              </a:spcAft>
-            </a:pPr>
-            <a:r>
-              <a:rPr sz="2800" b="1">
-                <a:solidFill>
-                  <a:srgbClr val="2F6FB5"/>
-                </a:solidFill>
-                <a:latin typeface="Nunito Sans"/>
-              </a:rPr>
-              <a:t>Sí es un argumento</a:t>
-            </a:r>
-          </a:p>
-        </p:txBody>
-      </p:sp>
-      <p:sp>
-        <p:nvSpPr>
-          <p:cNvPr id="9" name="TextBox 8"/>
-          <p:cNvSpPr txBox="1"/>
-          <p:nvPr/>
-        </p:nvSpPr>
-        <p:spPr>
-          <a:xfrm>
-            <a:off x="6446000" y="2400000"/>
-            <a:ext cx="4906000" cy="3500000"/>
-          </a:xfrm>
-          <a:prstGeom prst="rect">
-            <a:avLst/>
-          </a:prstGeom>
-          <a:noFill/>
-        </p:spPr>
-        <p:txBody>
-          <a:bodyPr wrap="square">
-            <a:spAutoFit/>
-          </a:bodyPr>
-          <a:lstStyle/>
-          <a:p>
-            <a:pPr>
-              <a:spcAft>
-                <a:spcPts val="1170"/>
-              </a:spcAft>
-            </a:pPr>
-            <a:r>
-              <a:rPr sz="2600" b="1">
-                <a:solidFill>
-                  <a:srgbClr val="E8793A"/>
-                </a:solidFill>
-                <a:latin typeface="Nunito Sans"/>
-              </a:rPr>
-              <a:t>• </a:t>
-            </a:r>
-            <a:r>
-              <a:rPr sz="2600" b="0">
-                <a:solidFill>
-                  <a:srgbClr val="1F2A44"/>
-                </a:solidFill>
-                <a:latin typeface="Nunito Sans"/>
-              </a:rPr>
-              <a:t>Hay algo que se quiere probar: la conclusión</a:t>
-            </a:r>
-          </a:p>
-          <a:p>
-            <a:pPr>
-              <a:spcAft>
-                <a:spcPts val="1170"/>
-              </a:spcAft>
-            </a:pPr>
-            <a:r>
-              <a:rPr sz="2600" b="1">
-                <a:solidFill>
-                  <a:srgbClr val="E8793A"/>
-                </a:solidFill>
-                <a:latin typeface="Nunito Sans"/>
-              </a:rPr>
-              <a:t>• </a:t>
-            </a:r>
-            <a:r>
-              <a:rPr sz="2600" b="0">
-                <a:solidFill>
-                  <a:srgbClr val="1F2A44"/>
-                </a:solidFill>
-                <a:latin typeface="Nunito Sans"/>
-              </a:rPr>
-              <a:t>Hay al menos una razón que lo apoya: una premisa</a:t>
-            </a:r>
-          </a:p>
-          <a:p>
-            <a:pPr>
-              <a:spcAft>
-                <a:spcPts val="1170"/>
-              </a:spcAft>
-            </a:pPr>
-            <a:r>
-              <a:rPr sz="2600" b="1">
-                <a:solidFill>
-                  <a:srgbClr val="E8793A"/>
-                </a:solidFill>
-                <a:latin typeface="Nunito Sans"/>
-              </a:rPr>
-              <a:t>• </a:t>
-            </a:r>
-            <a:r>
-              <a:rPr sz="2600" b="0">
-                <a:solidFill>
-                  <a:srgbClr val="1F2A44"/>
-                </a:solidFill>
-                <a:latin typeface="Nunito Sans"/>
-              </a:rPr>
-              <a:t>«Ven al cine hoy: la peli la quitan mañana»</a:t>
+              <a:t>Casos resueltos</a:t>
             </a:r>
           </a:p>
         </p:txBody>
